--- a/Presentations/Module_6_ObservableCollection_Presentation.pptx
+++ b/Presentations/Module_6_ObservableCollection_Presentation.pptx
@@ -2,23 +2,26 @@
 <file path=ppt/presentation.xml><?xml version="1.0" encoding="utf-8"?>
 <p:presentation xmlns:p="http://schemas.openxmlformats.org/presentationml/2006/main">
   <p:sldMasterIdLst>
-    <p:sldMasterId xmlns:r="http://schemas.openxmlformats.org/officeDocument/2006/relationships" id="2147483648" r:id="R4e38a0c569ca4c33"/>
+    <p:sldMasterId xmlns:r="http://schemas.openxmlformats.org/officeDocument/2006/relationships" id="2147483648" r:id="Rd94ba97191c649a0"/>
   </p:sldMasterIdLst>
   <p:notesMasterIdLst>
-    <p:notesMasterId xmlns:r="http://schemas.openxmlformats.org/officeDocument/2006/relationships" r:id="R744a932c76174b0f"/>
+    <p:notesMasterId xmlns:r="http://schemas.openxmlformats.org/officeDocument/2006/relationships" r:id="Rd2653d37aa414254"/>
   </p:notesMasterIdLst>
   <p:sldIdLst>
-    <p:sldId xmlns:r="http://schemas.openxmlformats.org/officeDocument/2006/relationships" id="256" r:id="R94cb6ad604d04aba"/>
-    <p:sldId xmlns:r="http://schemas.openxmlformats.org/officeDocument/2006/relationships" id="257" r:id="R799f1057e62d4b72"/>
-    <p:sldId xmlns:r="http://schemas.openxmlformats.org/officeDocument/2006/relationships" id="258" r:id="R32e4036a35f14652"/>
-    <p:sldId xmlns:r="http://schemas.openxmlformats.org/officeDocument/2006/relationships" id="259" r:id="R3bf554946ea7461c"/>
-    <p:sldId xmlns:r="http://schemas.openxmlformats.org/officeDocument/2006/relationships" id="260" r:id="R97f0179f897940dd"/>
-    <p:sldId xmlns:r="http://schemas.openxmlformats.org/officeDocument/2006/relationships" id="261" r:id="R365dadb1ce7e40cf"/>
-    <p:sldId xmlns:r="http://schemas.openxmlformats.org/officeDocument/2006/relationships" id="262" r:id="R7a8c38196e0c4a64"/>
-    <p:sldId xmlns:r="http://schemas.openxmlformats.org/officeDocument/2006/relationships" id="263" r:id="Rd410a07f70464855"/>
-    <p:sldId xmlns:r="http://schemas.openxmlformats.org/officeDocument/2006/relationships" id="264" r:id="Rf8f29ffeffa749f1"/>
-    <p:sldId xmlns:r="http://schemas.openxmlformats.org/officeDocument/2006/relationships" id="265" r:id="R7c10f6add5fe41aa"/>
-    <p:sldId xmlns:r="http://schemas.openxmlformats.org/officeDocument/2006/relationships" id="266" r:id="Rb56e6b830a5e4170"/>
+    <p:sldId xmlns:r="http://schemas.openxmlformats.org/officeDocument/2006/relationships" id="256" r:id="Ra7aa2934c9204b76"/>
+    <p:sldId xmlns:r="http://schemas.openxmlformats.org/officeDocument/2006/relationships" id="257" r:id="Rc59ff22ad5c64dec"/>
+    <p:sldId xmlns:r="http://schemas.openxmlformats.org/officeDocument/2006/relationships" id="258" r:id="R7de1857d8b5e48cc"/>
+    <p:sldId xmlns:r="http://schemas.openxmlformats.org/officeDocument/2006/relationships" id="259" r:id="Rdd34991ffd8a444b"/>
+    <p:sldId xmlns:r="http://schemas.openxmlformats.org/officeDocument/2006/relationships" id="260" r:id="Rb77f911782524fc0"/>
+    <p:sldId xmlns:r="http://schemas.openxmlformats.org/officeDocument/2006/relationships" id="261" r:id="R6478ba92ec4e4a2e"/>
+    <p:sldId xmlns:r="http://schemas.openxmlformats.org/officeDocument/2006/relationships" id="262" r:id="R87bc1383ffa54d36"/>
+    <p:sldId xmlns:r="http://schemas.openxmlformats.org/officeDocument/2006/relationships" id="263" r:id="Rf38b69261f644253"/>
+    <p:sldId xmlns:r="http://schemas.openxmlformats.org/officeDocument/2006/relationships" id="264" r:id="R9a20d5b27c1245d0"/>
+    <p:sldId xmlns:r="http://schemas.openxmlformats.org/officeDocument/2006/relationships" id="265" r:id="Rcfc561b422844f06"/>
+    <p:sldId xmlns:r="http://schemas.openxmlformats.org/officeDocument/2006/relationships" id="266" r:id="R5352f91479594ee4"/>
+    <p:sldId xmlns:r="http://schemas.openxmlformats.org/officeDocument/2006/relationships" id="267" r:id="R149c468de4344be4"/>
+    <p:sldId xmlns:r="http://schemas.openxmlformats.org/officeDocument/2006/relationships" id="268" r:id="R4aee8ba404f54fa7"/>
+    <p:sldId xmlns:r="http://schemas.openxmlformats.org/officeDocument/2006/relationships" id="269" r:id="R45e8999909134c7e"/>
   </p:sldIdLst>
   <p:sldSz cx="12192000" cy="6858000"/>
   <p:notesSz cx="6858000" cy="9144000"/>
@@ -579,7 +582,7 @@
           <a:lstStyle xmlns:a="http://schemas.openxmlformats.org/drawingml/2006/main"/>
           <a:p xmlns:a="http://schemas.openxmlformats.org/drawingml/2006/main">
             <a:r>
-              <a:t>Introduce Module 6. Open the matching Word tutorial after the exercise overview.</a:t>
+              <a:t>Open the matching Word tutorial after the exercise overview. Source: Module 6 Word tutorial.</a:t>
             </a:r>
           </a:p>
         </p:txBody>
@@ -649,7 +652,7 @@
           <a:lstStyle xmlns:a="http://schemas.openxmlformats.org/drawingml/2006/main"/>
           <a:p xmlns:a="http://schemas.openxmlformats.org/drawingml/2006/main">
             <a:r>
-              <a:t>After tutorial Step 5: run the app or inspect the code. Ask students to explain the observed result. Source: Module 6 Word tutorial.</a:t>
+              <a:t>After tutorial Step 3: run the app or inspect the code. Ask students to explain the observed result. Source: Module 6 Word tutorial.</a:t>
             </a:r>
           </a:p>
         </p:txBody>
@@ -719,7 +722,217 @@
           <a:lstStyle xmlns:a="http://schemas.openxmlformats.org/drawingml/2006/main"/>
           <a:p xmlns:a="http://schemas.openxmlformats.org/drawingml/2006/main">
             <a:r>
+              <a:t>Before tutorial Step 5: explain these concepts. Ask students to predict what the change will do. Then open Step 5 in the Word tutorial. Source: Module 6 Word tutorial. Related MAUI documentation: https://learn.microsoft.com/dotnet/maui/user-interface/controls/collectionview/populate-data</a:t>
+            </a:r>
+          </a:p>
+        </p:txBody>
+      </p:sp>
+      <p:sp>
+        <p:nvSpPr>
+          <p:cNvPr id="4" name="Slide Number Placeholder 3"/>
+          <p:cNvSpPr>
+            <a:spLocks xmlns:a="http://schemas.openxmlformats.org/drawingml/2006/main" noGrp="1"/>
+          </p:cNvSpPr>
+          <p:nvPr>
+            <p:ph type="sldNum" idx="5"/>
+          </p:nvPr>
+        </p:nvSpPr>
+        <p:spPr/>
+        <p:txBody>
+          <a:bodyPr xmlns:a="http://schemas.openxmlformats.org/drawingml/2006/main"/>
+          <a:lstStyle xmlns:a="http://schemas.openxmlformats.org/drawingml/2006/main"/>
+          <a:p xmlns:a="http://schemas.openxmlformats.org/drawingml/2006/main"/>
+        </p:txBody>
+      </p:sp>
+    </p:spTree>
+  </p:cSld>
+  <p:clrMapOvr>
+    <a:masterClrMapping xmlns:a="http://schemas.openxmlformats.org/drawingml/2006/main"/>
+  </p:clrMapOvr>
+</p:notes>
+</file>
+
+<file path=ppt/notesSlides/notesSlide12.xml><?xml version="1.0" encoding="utf-8"?>
+<p:notes xmlns:p="http://schemas.openxmlformats.org/presentationml/2006/main">
+  <p:cSld>
+    <p:spTree>
+      <p:nvGrpSpPr>
+        <p:cNvPr id="1" name=""/>
+        <p:cNvGrpSpPr/>
+        <p:nvPr/>
+      </p:nvGrpSpPr>
+      <p:grpSpPr>
+        <a:xfrm xmlns:a="http://schemas.openxmlformats.org/drawingml/2006/main"/>
+      </p:grpSpPr>
+      <p:sp>
+        <p:nvSpPr>
+          <p:cNvPr id="2" name="Slide Image Placeholder 1"/>
+          <p:cNvSpPr>
+            <a:spLocks xmlns:a="http://schemas.openxmlformats.org/drawingml/2006/main" noGrp="1"/>
+          </p:cNvSpPr>
+          <p:nvPr>
+            <p:ph type="sldImg" idx="0"/>
+          </p:nvPr>
+        </p:nvSpPr>
+        <p:spPr/>
+      </p:sp>
+      <p:sp>
+        <p:nvSpPr>
+          <p:cNvPr id="3" name="Notes Placeholder 2"/>
+          <p:cNvSpPr>
+            <a:spLocks xmlns:a="http://schemas.openxmlformats.org/drawingml/2006/main" noGrp="1"/>
+          </p:cNvSpPr>
+          <p:nvPr>
+            <p:ph type="body" idx="1"/>
+          </p:nvPr>
+        </p:nvSpPr>
+        <p:spPr/>
+        <p:txBody>
+          <a:bodyPr xmlns:a="http://schemas.openxmlformats.org/drawingml/2006/main"/>
+          <a:lstStyle xmlns:a="http://schemas.openxmlformats.org/drawingml/2006/main"/>
+          <a:p xmlns:a="http://schemas.openxmlformats.org/drawingml/2006/main">
+            <a:r>
+              <a:t>After tutorial Step 5: run the app or inspect the code. Ask students to explain the observed result. Source: Module 6 Word tutorial.</a:t>
+            </a:r>
+          </a:p>
+        </p:txBody>
+      </p:sp>
+      <p:sp>
+        <p:nvSpPr>
+          <p:cNvPr id="4" name="Slide Number Placeholder 3"/>
+          <p:cNvSpPr>
+            <a:spLocks xmlns:a="http://schemas.openxmlformats.org/drawingml/2006/main" noGrp="1"/>
+          </p:cNvSpPr>
+          <p:nvPr>
+            <p:ph type="sldNum" idx="5"/>
+          </p:nvPr>
+        </p:nvSpPr>
+        <p:spPr/>
+        <p:txBody>
+          <a:bodyPr xmlns:a="http://schemas.openxmlformats.org/drawingml/2006/main"/>
+          <a:lstStyle xmlns:a="http://schemas.openxmlformats.org/drawingml/2006/main"/>
+          <a:p xmlns:a="http://schemas.openxmlformats.org/drawingml/2006/main"/>
+        </p:txBody>
+      </p:sp>
+    </p:spTree>
+  </p:cSld>
+  <p:clrMapOvr>
+    <a:masterClrMapping xmlns:a="http://schemas.openxmlformats.org/drawingml/2006/main"/>
+  </p:clrMapOvr>
+</p:notes>
+</file>
+
+<file path=ppt/notesSlides/notesSlide13.xml><?xml version="1.0" encoding="utf-8"?>
+<p:notes xmlns:p="http://schemas.openxmlformats.org/presentationml/2006/main">
+  <p:cSld>
+    <p:spTree>
+      <p:nvGrpSpPr>
+        <p:cNvPr id="1" name=""/>
+        <p:cNvGrpSpPr/>
+        <p:nvPr/>
+      </p:nvGrpSpPr>
+      <p:grpSpPr>
+        <a:xfrm xmlns:a="http://schemas.openxmlformats.org/drawingml/2006/main"/>
+      </p:grpSpPr>
+      <p:sp>
+        <p:nvSpPr>
+          <p:cNvPr id="2" name="Slide Image Placeholder 1"/>
+          <p:cNvSpPr>
+            <a:spLocks xmlns:a="http://schemas.openxmlformats.org/drawingml/2006/main" noGrp="1"/>
+          </p:cNvSpPr>
+          <p:nvPr>
+            <p:ph type="sldImg" idx="0"/>
+          </p:nvPr>
+        </p:nvSpPr>
+        <p:spPr/>
+      </p:sp>
+      <p:sp>
+        <p:nvSpPr>
+          <p:cNvPr id="3" name="Notes Placeholder 2"/>
+          <p:cNvSpPr>
+            <a:spLocks xmlns:a="http://schemas.openxmlformats.org/drawingml/2006/main" noGrp="1"/>
+          </p:cNvSpPr>
+          <p:nvPr>
+            <p:ph type="body" idx="1"/>
+          </p:nvPr>
+        </p:nvSpPr>
+        <p:spPr/>
+        <p:txBody>
+          <a:bodyPr xmlns:a="http://schemas.openxmlformats.org/drawingml/2006/main"/>
+          <a:lstStyle xmlns:a="http://schemas.openxmlformats.org/drawingml/2006/main"/>
+          <a:p xmlns:a="http://schemas.openxmlformats.org/drawingml/2006/main">
+            <a:r>
               <a:t>Use the final tutorial checklist. Ask students to explain the module concept without reading code. Source: Module 6 Word tutorial.</a:t>
+            </a:r>
+          </a:p>
+        </p:txBody>
+      </p:sp>
+      <p:sp>
+        <p:nvSpPr>
+          <p:cNvPr id="4" name="Slide Number Placeholder 3"/>
+          <p:cNvSpPr>
+            <a:spLocks xmlns:a="http://schemas.openxmlformats.org/drawingml/2006/main" noGrp="1"/>
+          </p:cNvSpPr>
+          <p:nvPr>
+            <p:ph type="sldNum" idx="5"/>
+          </p:nvPr>
+        </p:nvSpPr>
+        <p:spPr/>
+        <p:txBody>
+          <a:bodyPr xmlns:a="http://schemas.openxmlformats.org/drawingml/2006/main"/>
+          <a:lstStyle xmlns:a="http://schemas.openxmlformats.org/drawingml/2006/main"/>
+          <a:p xmlns:a="http://schemas.openxmlformats.org/drawingml/2006/main"/>
+        </p:txBody>
+      </p:sp>
+    </p:spTree>
+  </p:cSld>
+  <p:clrMapOvr>
+    <a:masterClrMapping xmlns:a="http://schemas.openxmlformats.org/drawingml/2006/main"/>
+  </p:clrMapOvr>
+</p:notes>
+</file>
+
+<file path=ppt/notesSlides/notesSlide14.xml><?xml version="1.0" encoding="utf-8"?>
+<p:notes xmlns:p="http://schemas.openxmlformats.org/presentationml/2006/main">
+  <p:cSld>
+    <p:spTree>
+      <p:nvGrpSpPr>
+        <p:cNvPr id="1" name=""/>
+        <p:cNvGrpSpPr/>
+        <p:nvPr/>
+      </p:nvGrpSpPr>
+      <p:grpSpPr>
+        <a:xfrm xmlns:a="http://schemas.openxmlformats.org/drawingml/2006/main"/>
+      </p:grpSpPr>
+      <p:sp>
+        <p:nvSpPr>
+          <p:cNvPr id="2" name="Slide Image Placeholder 1"/>
+          <p:cNvSpPr>
+            <a:spLocks xmlns:a="http://schemas.openxmlformats.org/drawingml/2006/main" noGrp="1"/>
+          </p:cNvSpPr>
+          <p:nvPr>
+            <p:ph type="sldImg" idx="0"/>
+          </p:nvPr>
+        </p:nvSpPr>
+        <p:spPr/>
+      </p:sp>
+      <p:sp>
+        <p:nvSpPr>
+          <p:cNvPr id="3" name="Notes Placeholder 2"/>
+          <p:cNvSpPr>
+            <a:spLocks xmlns:a="http://schemas.openxmlformats.org/drawingml/2006/main" noGrp="1"/>
+          </p:cNvSpPr>
+          <p:nvPr>
+            <p:ph type="body" idx="1"/>
+          </p:nvPr>
+        </p:nvSpPr>
+        <p:spPr/>
+        <p:txBody>
+          <a:bodyPr xmlns:a="http://schemas.openxmlformats.org/drawingml/2006/main"/>
+          <a:lstStyle xmlns:a="http://schemas.openxmlformats.org/drawingml/2006/main"/>
+          <a:p xmlns:a="http://schemas.openxmlformats.org/drawingml/2006/main">
+            <a:r>
+              <a:t>Student reading: CollectionView data updates. https://learn.microsoft.com/dotnet/maui/user-interface/controls/collectionview/populate-data</a:t>
             </a:r>
           </a:p>
         </p:txBody>
@@ -789,7 +1002,7 @@
           <a:lstStyle xmlns:a="http://schemas.openxmlformats.org/drawingml/2006/main"/>
           <a:p xmlns:a="http://schemas.openxmlformats.org/drawingml/2006/main">
             <a:r>
-              <a:t>Explain the work for Module 6. Show the expected app result before students start. Source: Module 6 Word tutorial.</a:t>
+              <a:t>Give students the outcome before they start. Source: Module 6 Word tutorial.</a:t>
             </a:r>
           </a:p>
         </p:txBody>
@@ -859,7 +1072,7 @@
           <a:lstStyle xmlns:a="http://schemas.openxmlformats.org/drawingml/2006/main"/>
           <a:p xmlns:a="http://schemas.openxmlformats.org/drawingml/2006/main">
             <a:r>
-              <a:t>Before tutorial Step 1: explain these concepts. Ask students to predict what the change will do. Then open Step 1 in the Word tutorial. Source: Module 6 Word tutorial.</a:t>
+              <a:t>Explain the framework idea before the first exercise step. MAUI documentation: https://learn.microsoft.com/dotnet/maui/user-interface/controls/collectionview/populate-data</a:t>
             </a:r>
           </a:p>
         </p:txBody>
@@ -929,7 +1142,7 @@
           <a:lstStyle xmlns:a="http://schemas.openxmlformats.org/drawingml/2006/main"/>
           <a:p xmlns:a="http://schemas.openxmlformats.org/drawingml/2006/main">
             <a:r>
-              <a:t>After tutorial Step 1: run the app or inspect the code. Ask students to explain the observed result. Source: Module 6 Word tutorial.</a:t>
+              <a:t>Ask students to identify the C# object, the XAML control, and the connection between them. Source: Module 6 Word tutorial. MAUI documentation: https://learn.microsoft.com/dotnet/maui/user-interface/controls/collectionview/populate-data</a:t>
             </a:r>
           </a:p>
         </p:txBody>
@@ -999,7 +1212,7 @@
           <a:lstStyle xmlns:a="http://schemas.openxmlformats.org/drawingml/2006/main"/>
           <a:p xmlns:a="http://schemas.openxmlformats.org/drawingml/2006/main">
             <a:r>
-              <a:t>Before tutorial Step 2: explain these concepts. Ask students to predict what the change will do. Then open Step 2 in the Word tutorial. Source: Module 6 Word tutorial.</a:t>
+              <a:t>Before tutorial Step 1: explain these concepts. Ask students to predict what the change will do. Then open Step 1 in the Word tutorial. Source: Module 6 Word tutorial. Related MAUI documentation: https://learn.microsoft.com/dotnet/maui/user-interface/controls/collectionview/populate-data</a:t>
             </a:r>
           </a:p>
         </p:txBody>
@@ -1069,7 +1282,7 @@
           <a:lstStyle xmlns:a="http://schemas.openxmlformats.org/drawingml/2006/main"/>
           <a:p xmlns:a="http://schemas.openxmlformats.org/drawingml/2006/main">
             <a:r>
-              <a:t>After tutorial Step 2: run the app or inspect the code. Ask students to explain the observed result. Source: Module 6 Word tutorial.</a:t>
+              <a:t>After tutorial Step 1: run the app or inspect the code. Ask students to explain the observed result. Source: Module 6 Word tutorial.</a:t>
             </a:r>
           </a:p>
         </p:txBody>
@@ -1139,7 +1352,7 @@
           <a:lstStyle xmlns:a="http://schemas.openxmlformats.org/drawingml/2006/main"/>
           <a:p xmlns:a="http://schemas.openxmlformats.org/drawingml/2006/main">
             <a:r>
-              <a:t>Before tutorial Step 3: explain these concepts. Ask students to predict what the change will do. Then open Step 3 in the Word tutorial. Source: Module 6 Word tutorial.</a:t>
+              <a:t>Before tutorial Step 2: explain these concepts. Ask students to predict what the change will do. Then open Step 2 in the Word tutorial. Source: Module 6 Word tutorial. Related MAUI documentation: https://learn.microsoft.com/dotnet/maui/user-interface/controls/collectionview/populate-data</a:t>
             </a:r>
           </a:p>
         </p:txBody>
@@ -1209,7 +1422,7 @@
           <a:lstStyle xmlns:a="http://schemas.openxmlformats.org/drawingml/2006/main"/>
           <a:p xmlns:a="http://schemas.openxmlformats.org/drawingml/2006/main">
             <a:r>
-              <a:t>After tutorial Step 3: run the app or inspect the code. Ask students to explain the observed result. Source: Module 6 Word tutorial.</a:t>
+              <a:t>After tutorial Step 2: run the app or inspect the code. Ask students to explain the observed result. Source: Module 6 Word tutorial.</a:t>
             </a:r>
           </a:p>
         </p:txBody>
@@ -1279,7 +1492,7 @@
           <a:lstStyle xmlns:a="http://schemas.openxmlformats.org/drawingml/2006/main"/>
           <a:p xmlns:a="http://schemas.openxmlformats.org/drawingml/2006/main">
             <a:r>
-              <a:t>Before tutorial Step 5: explain these concepts. Ask students to predict what the change will do. Then open Step 5 in the Word tutorial. Source: Module 6 Word tutorial.</a:t>
+              <a:t>Before tutorial Step 3: explain these concepts. Ask students to predict what the change will do. Then open Step 3 in the Word tutorial. Source: Module 6 Word tutorial. Related MAUI documentation: https://learn.microsoft.com/dotnet/maui/user-interface/controls/collectionview/populate-data</a:t>
             </a:r>
           </a:p>
         </p:txBody>
@@ -1389,7 +1602,7 @@
           <p:cNvPr id="14" name="Picture 13">
             <a:extLst xmlns:a="http://schemas.openxmlformats.org/drawingml/2006/main">
               <a:ext uri="{FF2B5EF4-FFF2-40B4-BE49-F238E27FC236}">
-                <a16:creationId xmlns:a16="http://schemas.microsoft.com/office/drawing/2014/main" id="{8AE2F8D3-D3AD-429B-906A-7FC368A93EAD}"/>
+                <a16:creationId xmlns:a16="http://schemas.microsoft.com/office/drawing/2014/main" id="{10B73114-A675-49AA-B61D-F9C9FDDDC6FA}"/>
               </a:ext>
             </a:extLst>
           </p:cNvPr>
@@ -1399,7 +1612,7 @@
           <p:nvPr/>
         </p:nvPicPr>
         <p:blipFill>
-          <a:blip xmlns:r="http://schemas.openxmlformats.org/officeDocument/2006/relationships" xmlns:a="http://schemas.openxmlformats.org/drawingml/2006/main" r:embed="R599bc17119764288">
+          <a:blip xmlns:r="http://schemas.openxmlformats.org/officeDocument/2006/relationships" xmlns:a="http://schemas.openxmlformats.org/drawingml/2006/main" r:embed="R0e020d16990c430d">
             <a:alphaModFix amt="40000"/>
           </a:blip>
           <a:stretch xmlns:a="http://schemas.openxmlformats.org/drawingml/2006/main">
@@ -1562,7 +1775,7 @@
           <p:cNvPr id="2" name="Title 1">
             <a:extLst xmlns:a="http://schemas.openxmlformats.org/drawingml/2006/main">
               <a:ext uri="{FF2B5EF4-FFF2-40B4-BE49-F238E27FC236}">
-                <a16:creationId xmlns:a16="http://schemas.microsoft.com/office/drawing/2014/main" id="{030A5A8E-B9F8-43EC-ACB9-EFDEFAE725A5}"/>
+                <a16:creationId xmlns:a16="http://schemas.microsoft.com/office/drawing/2014/main" id="{46814110-C5EE-4EC6-A147-8D1E27EDF2C8}"/>
               </a:ext>
             </a:extLst>
           </p:cNvPr>
@@ -1609,7 +1822,7 @@
           <p:cNvPr id="3" name="Subtitle 2">
             <a:extLst xmlns:a="http://schemas.openxmlformats.org/drawingml/2006/main">
               <a:ext uri="{FF2B5EF4-FFF2-40B4-BE49-F238E27FC236}">
-                <a16:creationId xmlns:a16="http://schemas.microsoft.com/office/drawing/2014/main" id="{3E00CC68-F395-4871-BE93-C082953FA7AA}"/>
+                <a16:creationId xmlns:a16="http://schemas.microsoft.com/office/drawing/2014/main" id="{88993646-547D-4B58-8F7C-D62C9DEC7CA1}"/>
               </a:ext>
             </a:extLst>
           </p:cNvPr>
@@ -1737,7 +1950,7 @@
           <p:cNvPr id="4" name="Date Placeholder 3">
             <a:extLst xmlns:a="http://schemas.openxmlformats.org/drawingml/2006/main">
               <a:ext uri="{FF2B5EF4-FFF2-40B4-BE49-F238E27FC236}">
-                <a16:creationId xmlns:a16="http://schemas.microsoft.com/office/drawing/2014/main" id="{042B1C76-D180-4250-AF57-CCAAC300ADB5}"/>
+                <a16:creationId xmlns:a16="http://schemas.microsoft.com/office/drawing/2014/main" id="{A927226B-76C0-41A5-A9B2-C922764AA675}"/>
               </a:ext>
             </a:extLst>
           </p:cNvPr>
@@ -1765,7 +1978,7 @@
           <p:cNvPr id="5" name="Footer Placeholder 4">
             <a:extLst xmlns:a="http://schemas.openxmlformats.org/drawingml/2006/main">
               <a:ext uri="{FF2B5EF4-FFF2-40B4-BE49-F238E27FC236}">
-                <a16:creationId xmlns:a16="http://schemas.microsoft.com/office/drawing/2014/main" id="{D763891A-FA03-4890-A119-22B2A67699AE}"/>
+                <a16:creationId xmlns:a16="http://schemas.microsoft.com/office/drawing/2014/main" id="{DDC3E67B-708C-49DC-8722-C371F2616C41}"/>
               </a:ext>
             </a:extLst>
           </p:cNvPr>
@@ -1790,7 +2003,7 @@
           <p:cNvPr id="6" name="Slide Number Placeholder 5">
             <a:extLst xmlns:a="http://schemas.openxmlformats.org/drawingml/2006/main">
               <a:ext uri="{FF2B5EF4-FFF2-40B4-BE49-F238E27FC236}">
-                <a16:creationId xmlns:a16="http://schemas.microsoft.com/office/drawing/2014/main" id="{DA66DF87-A294-41A8-9670-8A2B9F57B1DC}"/>
+                <a16:creationId xmlns:a16="http://schemas.microsoft.com/office/drawing/2014/main" id="{B8472FF8-4520-4459-B823-014538010354}"/>
               </a:ext>
             </a:extLst>
           </p:cNvPr>
@@ -1889,7 +2102,7 @@
           <p:cNvPr id="2" name="Title 1">
             <a:extLst xmlns:a="http://schemas.openxmlformats.org/drawingml/2006/main">
               <a:ext uri="{FF2B5EF4-FFF2-40B4-BE49-F238E27FC236}">
-                <a16:creationId xmlns:a16="http://schemas.microsoft.com/office/drawing/2014/main" id="{B0C7C4DD-DBD6-4425-95B9-A3CA5A37D7A2}"/>
+                <a16:creationId xmlns:a16="http://schemas.microsoft.com/office/drawing/2014/main" id="{48602CD7-4E32-45AD-BCFE-18A4B039DE7E}"/>
               </a:ext>
             </a:extLst>
           </p:cNvPr>
@@ -1916,7 +2129,7 @@
           <p:cNvPr id="3" name="Vertical Text Placeholder 2">
             <a:extLst xmlns:a="http://schemas.openxmlformats.org/drawingml/2006/main">
               <a:ext uri="{FF2B5EF4-FFF2-40B4-BE49-F238E27FC236}">
-                <a16:creationId xmlns:a16="http://schemas.microsoft.com/office/drawing/2014/main" id="{6D1E7BE2-C86F-4EB5-860C-57E0A7584A34}"/>
+                <a16:creationId xmlns:a16="http://schemas.microsoft.com/office/drawing/2014/main" id="{A40A2DCC-A9A0-457F-9017-6CCDCDB3F3F7}"/>
               </a:ext>
             </a:extLst>
           </p:cNvPr>
@@ -1978,7 +2191,7 @@
           <p:cNvPr id="4" name="Date Placeholder 3">
             <a:extLst xmlns:a="http://schemas.openxmlformats.org/drawingml/2006/main">
               <a:ext uri="{FF2B5EF4-FFF2-40B4-BE49-F238E27FC236}">
-                <a16:creationId xmlns:a16="http://schemas.microsoft.com/office/drawing/2014/main" id="{2B1794FF-A76E-47D0-8E06-F46C3A01000E}"/>
+                <a16:creationId xmlns:a16="http://schemas.microsoft.com/office/drawing/2014/main" id="{5CB5FFF7-614F-4BEF-854C-9E1F9FD8541E}"/>
               </a:ext>
             </a:extLst>
           </p:cNvPr>
@@ -2006,7 +2219,7 @@
           <p:cNvPr id="5" name="Footer Placeholder 4">
             <a:extLst xmlns:a="http://schemas.openxmlformats.org/drawingml/2006/main">
               <a:ext uri="{FF2B5EF4-FFF2-40B4-BE49-F238E27FC236}">
-                <a16:creationId xmlns:a16="http://schemas.microsoft.com/office/drawing/2014/main" id="{139CE305-3347-45B9-A369-99CEB9FF5789}"/>
+                <a16:creationId xmlns:a16="http://schemas.microsoft.com/office/drawing/2014/main" id="{46404CF3-F6A6-451C-B671-0175C7387549}"/>
               </a:ext>
             </a:extLst>
           </p:cNvPr>
@@ -2031,7 +2244,7 @@
           <p:cNvPr id="6" name="Slide Number Placeholder 5">
             <a:extLst xmlns:a="http://schemas.openxmlformats.org/drawingml/2006/main">
               <a:ext uri="{FF2B5EF4-FFF2-40B4-BE49-F238E27FC236}">
-                <a16:creationId xmlns:a16="http://schemas.microsoft.com/office/drawing/2014/main" id="{00D4DAF7-CED6-4D82-A428-E340DA63CD82}"/>
+                <a16:creationId xmlns:a16="http://schemas.microsoft.com/office/drawing/2014/main" id="{E268AEDD-2942-49FC-AA90-4D3E22A7CF0F}"/>
               </a:ext>
             </a:extLst>
           </p:cNvPr>
@@ -2076,7 +2289,7 @@
           <p:cNvPr id="2" name="Vertical Title 1">
             <a:extLst xmlns:a="http://schemas.openxmlformats.org/drawingml/2006/main">
               <a:ext uri="{FF2B5EF4-FFF2-40B4-BE49-F238E27FC236}">
-                <a16:creationId xmlns:a16="http://schemas.microsoft.com/office/drawing/2014/main" id="{9F0B9954-EB8F-41CB-B35F-05D47F91F412}"/>
+                <a16:creationId xmlns:a16="http://schemas.microsoft.com/office/drawing/2014/main" id="{A1B73A6F-4BF2-4832-BFAB-222A77C3E7AF}"/>
               </a:ext>
             </a:extLst>
           </p:cNvPr>
@@ -2108,7 +2321,7 @@
           <p:cNvPr id="3" name="Vertical Text Placeholder 2">
             <a:extLst xmlns:a="http://schemas.openxmlformats.org/drawingml/2006/main">
               <a:ext uri="{FF2B5EF4-FFF2-40B4-BE49-F238E27FC236}">
-                <a16:creationId xmlns:a16="http://schemas.microsoft.com/office/drawing/2014/main" id="{C37F543C-41E9-425F-9713-2EAA03FA3148}"/>
+                <a16:creationId xmlns:a16="http://schemas.microsoft.com/office/drawing/2014/main" id="{B3AD5F90-5EA2-481B-B56F-A9655F35F563}"/>
               </a:ext>
             </a:extLst>
           </p:cNvPr>
@@ -2175,7 +2388,7 @@
           <p:cNvPr id="4" name="Date Placeholder 3">
             <a:extLst xmlns:a="http://schemas.openxmlformats.org/drawingml/2006/main">
               <a:ext uri="{FF2B5EF4-FFF2-40B4-BE49-F238E27FC236}">
-                <a16:creationId xmlns:a16="http://schemas.microsoft.com/office/drawing/2014/main" id="{CCD494A5-ADBF-40A8-BE0B-9B99A548970E}"/>
+                <a16:creationId xmlns:a16="http://schemas.microsoft.com/office/drawing/2014/main" id="{C4E216F0-BBF9-4C80-A3CD-F7E43C29D969}"/>
               </a:ext>
             </a:extLst>
           </p:cNvPr>
@@ -2203,7 +2416,7 @@
           <p:cNvPr id="5" name="Footer Placeholder 4">
             <a:extLst xmlns:a="http://schemas.openxmlformats.org/drawingml/2006/main">
               <a:ext uri="{FF2B5EF4-FFF2-40B4-BE49-F238E27FC236}">
-                <a16:creationId xmlns:a16="http://schemas.microsoft.com/office/drawing/2014/main" id="{9C8F94CF-ADF4-4518-93EB-B626EB61AE9B}"/>
+                <a16:creationId xmlns:a16="http://schemas.microsoft.com/office/drawing/2014/main" id="{26977E61-00F6-4D64-81EE-50CF9AC1D315}"/>
               </a:ext>
             </a:extLst>
           </p:cNvPr>
@@ -2228,7 +2441,7 @@
           <p:cNvPr id="6" name="Slide Number Placeholder 5">
             <a:extLst xmlns:a="http://schemas.openxmlformats.org/drawingml/2006/main">
               <a:ext uri="{FF2B5EF4-FFF2-40B4-BE49-F238E27FC236}">
-                <a16:creationId xmlns:a16="http://schemas.microsoft.com/office/drawing/2014/main" id="{07D374D0-938D-47E0-BA72-7984573CD4A5}"/>
+                <a16:creationId xmlns:a16="http://schemas.microsoft.com/office/drawing/2014/main" id="{855ABE48-8494-4A14-B9B6-5F97B8B1A44D}"/>
               </a:ext>
             </a:extLst>
           </p:cNvPr>
@@ -2273,7 +2486,7 @@
           <p:cNvPr id="3" name="Content Placeholder 2">
             <a:extLst xmlns:a="http://schemas.openxmlformats.org/drawingml/2006/main">
               <a:ext uri="{FF2B5EF4-FFF2-40B4-BE49-F238E27FC236}">
-                <a16:creationId xmlns:a16="http://schemas.microsoft.com/office/drawing/2014/main" id="{A1BF96DB-F990-4909-B26A-7B9C9E805A9F}"/>
+                <a16:creationId xmlns:a16="http://schemas.microsoft.com/office/drawing/2014/main" id="{F18BBF66-8A4E-4CCE-B48F-A983CA69D2CD}"/>
               </a:ext>
             </a:extLst>
           </p:cNvPr>
@@ -2336,7 +2549,7 @@
           <p:cNvPr id="4" name="Date Placeholder 3">
             <a:extLst xmlns:a="http://schemas.openxmlformats.org/drawingml/2006/main">
               <a:ext uri="{FF2B5EF4-FFF2-40B4-BE49-F238E27FC236}">
-                <a16:creationId xmlns:a16="http://schemas.microsoft.com/office/drawing/2014/main" id="{76F423A3-3B2B-4499-A3CB-F0E8EFA1038F}"/>
+                <a16:creationId xmlns:a16="http://schemas.microsoft.com/office/drawing/2014/main" id="{287EAD35-E63B-4CDB-A271-DAB1397E2D85}"/>
               </a:ext>
             </a:extLst>
           </p:cNvPr>
@@ -2364,7 +2577,7 @@
           <p:cNvPr id="5" name="Footer Placeholder 4">
             <a:extLst xmlns:a="http://schemas.openxmlformats.org/drawingml/2006/main">
               <a:ext uri="{FF2B5EF4-FFF2-40B4-BE49-F238E27FC236}">
-                <a16:creationId xmlns:a16="http://schemas.microsoft.com/office/drawing/2014/main" id="{5BB8DF31-42CB-474E-8C53-7E7856E5BAD1}"/>
+                <a16:creationId xmlns:a16="http://schemas.microsoft.com/office/drawing/2014/main" id="{8B70EB83-1F85-4090-B435-40121C637579}"/>
               </a:ext>
             </a:extLst>
           </p:cNvPr>
@@ -2389,7 +2602,7 @@
           <p:cNvPr id="6" name="Slide Number Placeholder 5">
             <a:extLst xmlns:a="http://schemas.openxmlformats.org/drawingml/2006/main">
               <a:ext uri="{FF2B5EF4-FFF2-40B4-BE49-F238E27FC236}">
-                <a16:creationId xmlns:a16="http://schemas.microsoft.com/office/drawing/2014/main" id="{7A4DBCA2-8219-4C0A-B41F-857554AEB39C}"/>
+                <a16:creationId xmlns:a16="http://schemas.microsoft.com/office/drawing/2014/main" id="{1BE9DCCB-2686-4879-9CED-7F5D6AFD85AE}"/>
               </a:ext>
             </a:extLst>
           </p:cNvPr>
@@ -2477,7 +2690,7 @@
           <p:cNvPr id="2" name="Title 1">
             <a:extLst xmlns:a="http://schemas.openxmlformats.org/drawingml/2006/main">
               <a:ext uri="{FF2B5EF4-FFF2-40B4-BE49-F238E27FC236}">
-                <a16:creationId xmlns:a16="http://schemas.microsoft.com/office/drawing/2014/main" id="{34910059-0011-4858-A822-504084ED3524}"/>
+                <a16:creationId xmlns:a16="http://schemas.microsoft.com/office/drawing/2014/main" id="{E3A8F523-0720-4F9D-9CFB-8A1B2CC1D179}"/>
               </a:ext>
             </a:extLst>
           </p:cNvPr>
@@ -2515,7 +2728,7 @@
           <p:cNvPr id="3" name="Text Placeholder 2">
             <a:extLst xmlns:a="http://schemas.openxmlformats.org/drawingml/2006/main">
               <a:ext uri="{FF2B5EF4-FFF2-40B4-BE49-F238E27FC236}">
-                <a16:creationId xmlns:a16="http://schemas.microsoft.com/office/drawing/2014/main" id="{C5CF9937-A820-4EF8-BEAC-BD19F57F111C}"/>
+                <a16:creationId xmlns:a16="http://schemas.microsoft.com/office/drawing/2014/main" id="{724679CF-BF0C-4026-B169-7AFC8E827FAC}"/>
               </a:ext>
             </a:extLst>
           </p:cNvPr>
@@ -2641,7 +2854,7 @@
           <p:cNvPr id="4" name="Date Placeholder 3">
             <a:extLst xmlns:a="http://schemas.openxmlformats.org/drawingml/2006/main">
               <a:ext uri="{FF2B5EF4-FFF2-40B4-BE49-F238E27FC236}">
-                <a16:creationId xmlns:a16="http://schemas.microsoft.com/office/drawing/2014/main" id="{D32CC9EB-E898-440A-BE4A-E0D7AC2089A9}"/>
+                <a16:creationId xmlns:a16="http://schemas.microsoft.com/office/drawing/2014/main" id="{69A39B37-1B3B-4790-B012-205020162FE6}"/>
               </a:ext>
             </a:extLst>
           </p:cNvPr>
@@ -2669,7 +2882,7 @@
           <p:cNvPr id="5" name="Footer Placeholder 4">
             <a:extLst xmlns:a="http://schemas.openxmlformats.org/drawingml/2006/main">
               <a:ext uri="{FF2B5EF4-FFF2-40B4-BE49-F238E27FC236}">
-                <a16:creationId xmlns:a16="http://schemas.microsoft.com/office/drawing/2014/main" id="{77BD5D90-B1B5-4B36-B0D0-EB23B7EE54B6}"/>
+                <a16:creationId xmlns:a16="http://schemas.microsoft.com/office/drawing/2014/main" id="{F0CE3DDE-F4A9-4059-B8E0-9CFF123F3F98}"/>
               </a:ext>
             </a:extLst>
           </p:cNvPr>
@@ -2694,7 +2907,7 @@
           <p:cNvPr id="6" name="Slide Number Placeholder 5">
             <a:extLst xmlns:a="http://schemas.openxmlformats.org/drawingml/2006/main">
               <a:ext uri="{FF2B5EF4-FFF2-40B4-BE49-F238E27FC236}">
-                <a16:creationId xmlns:a16="http://schemas.microsoft.com/office/drawing/2014/main" id="{768E1396-93A3-4EB1-9C74-6C5BE4132510}"/>
+                <a16:creationId xmlns:a16="http://schemas.microsoft.com/office/drawing/2014/main" id="{0A1D69D7-5E42-47CE-8B1D-E3A3DD42691A}"/>
               </a:ext>
             </a:extLst>
           </p:cNvPr>
@@ -2739,7 +2952,7 @@
           <p:cNvPr id="2" name="Title 1">
             <a:extLst xmlns:a="http://schemas.openxmlformats.org/drawingml/2006/main">
               <a:ext uri="{FF2B5EF4-FFF2-40B4-BE49-F238E27FC236}">
-                <a16:creationId xmlns:a16="http://schemas.microsoft.com/office/drawing/2014/main" id="{A688FC8D-E1E9-4FB6-B1C9-7B9B0E5112F9}"/>
+                <a16:creationId xmlns:a16="http://schemas.microsoft.com/office/drawing/2014/main" id="{E457A166-B4A9-49AE-ACCB-48131F8F6578}"/>
               </a:ext>
             </a:extLst>
           </p:cNvPr>
@@ -2766,7 +2979,7 @@
           <p:cNvPr id="3" name="Content Placeholder 2">
             <a:extLst xmlns:a="http://schemas.openxmlformats.org/drawingml/2006/main">
               <a:ext uri="{FF2B5EF4-FFF2-40B4-BE49-F238E27FC236}">
-                <a16:creationId xmlns:a16="http://schemas.microsoft.com/office/drawing/2014/main" id="{5884E1EA-6A54-48B5-A884-A8C587C97055}"/>
+                <a16:creationId xmlns:a16="http://schemas.microsoft.com/office/drawing/2014/main" id="{F8A7DDD2-A264-442D-AE89-78E838C6496A}"/>
               </a:ext>
             </a:extLst>
           </p:cNvPr>
@@ -2871,7 +3084,7 @@
           <p:cNvPr id="4" name="Content Placeholder 3">
             <a:extLst xmlns:a="http://schemas.openxmlformats.org/drawingml/2006/main">
               <a:ext uri="{FF2B5EF4-FFF2-40B4-BE49-F238E27FC236}">
-                <a16:creationId xmlns:a16="http://schemas.microsoft.com/office/drawing/2014/main" id="{1040BA72-7504-4D4E-9597-4C0B24C8C06D}"/>
+                <a16:creationId xmlns:a16="http://schemas.microsoft.com/office/drawing/2014/main" id="{D9D46197-7686-4940-BC7F-1F7F7BDF228D}"/>
               </a:ext>
             </a:extLst>
           </p:cNvPr>
@@ -2976,7 +3189,7 @@
           <p:cNvPr id="5" name="Date Placeholder 4">
             <a:extLst xmlns:a="http://schemas.openxmlformats.org/drawingml/2006/main">
               <a:ext uri="{FF2B5EF4-FFF2-40B4-BE49-F238E27FC236}">
-                <a16:creationId xmlns:a16="http://schemas.microsoft.com/office/drawing/2014/main" id="{9507F02F-8F04-408D-8874-13F95FB1DD48}"/>
+                <a16:creationId xmlns:a16="http://schemas.microsoft.com/office/drawing/2014/main" id="{76F91BD4-CA0E-4900-840A-0DF7C088689E}"/>
               </a:ext>
             </a:extLst>
           </p:cNvPr>
@@ -3004,7 +3217,7 @@
           <p:cNvPr id="6" name="Footer Placeholder 5">
             <a:extLst xmlns:a="http://schemas.openxmlformats.org/drawingml/2006/main">
               <a:ext uri="{FF2B5EF4-FFF2-40B4-BE49-F238E27FC236}">
-                <a16:creationId xmlns:a16="http://schemas.microsoft.com/office/drawing/2014/main" id="{62673B64-F4C5-4DBA-BA39-21613EB84255}"/>
+                <a16:creationId xmlns:a16="http://schemas.microsoft.com/office/drawing/2014/main" id="{7CB4BF8B-3E26-4BBC-80EF-B014A8DE8FF2}"/>
               </a:ext>
             </a:extLst>
           </p:cNvPr>
@@ -3029,7 +3242,7 @@
           <p:cNvPr id="7" name="Slide Number Placeholder 6">
             <a:extLst xmlns:a="http://schemas.openxmlformats.org/drawingml/2006/main">
               <a:ext uri="{FF2B5EF4-FFF2-40B4-BE49-F238E27FC236}">
-                <a16:creationId xmlns:a16="http://schemas.microsoft.com/office/drawing/2014/main" id="{3D84774E-3AE8-4425-90C2-1930CBF9BC1A}"/>
+                <a16:creationId xmlns:a16="http://schemas.microsoft.com/office/drawing/2014/main" id="{6FD3531F-E694-4E83-B772-737A3CE90C1D}"/>
               </a:ext>
             </a:extLst>
           </p:cNvPr>
@@ -3074,7 +3287,7 @@
           <p:cNvPr id="2" name="Title 1">
             <a:extLst xmlns:a="http://schemas.openxmlformats.org/drawingml/2006/main">
               <a:ext uri="{FF2B5EF4-FFF2-40B4-BE49-F238E27FC236}">
-                <a16:creationId xmlns:a16="http://schemas.microsoft.com/office/drawing/2014/main" id="{E2F4A396-63BD-4129-93BA-A6E92731E400}"/>
+                <a16:creationId xmlns:a16="http://schemas.microsoft.com/office/drawing/2014/main" id="{FA016EEC-B78D-4BC9-B724-A2523D2A395E}"/>
               </a:ext>
             </a:extLst>
           </p:cNvPr>
@@ -3106,7 +3319,7 @@
           <p:cNvPr id="3" name="Text Placeholder 2">
             <a:extLst xmlns:a="http://schemas.openxmlformats.org/drawingml/2006/main">
               <a:ext uri="{FF2B5EF4-FFF2-40B4-BE49-F238E27FC236}">
-                <a16:creationId xmlns:a16="http://schemas.microsoft.com/office/drawing/2014/main" id="{3DFCD240-0B6F-4CE8-8E8A-CDEFAC6A73FB}"/>
+                <a16:creationId xmlns:a16="http://schemas.microsoft.com/office/drawing/2014/main" id="{C5251B65-15BF-4903-B767-93D9CC3DC497}"/>
               </a:ext>
             </a:extLst>
           </p:cNvPr>
@@ -3178,7 +3391,7 @@
           <p:cNvPr id="4" name="Content Placeholder 3">
             <a:extLst xmlns:a="http://schemas.openxmlformats.org/drawingml/2006/main">
               <a:ext uri="{FF2B5EF4-FFF2-40B4-BE49-F238E27FC236}">
-                <a16:creationId xmlns:a16="http://schemas.microsoft.com/office/drawing/2014/main" id="{86D45125-EDB1-441F-B9C4-CDC753AB6973}"/>
+                <a16:creationId xmlns:a16="http://schemas.microsoft.com/office/drawing/2014/main" id="{1D25E320-29D3-4D2D-A295-0FE5908F0FA0}"/>
               </a:ext>
             </a:extLst>
           </p:cNvPr>
@@ -3282,7 +3495,7 @@
           <p:cNvPr id="5" name="Text Placeholder 4">
             <a:extLst xmlns:a="http://schemas.openxmlformats.org/drawingml/2006/main">
               <a:ext uri="{FF2B5EF4-FFF2-40B4-BE49-F238E27FC236}">
-                <a16:creationId xmlns:a16="http://schemas.microsoft.com/office/drawing/2014/main" id="{E0AF6A68-D2BF-42B3-85DD-5DDC66FCDEB5}"/>
+                <a16:creationId xmlns:a16="http://schemas.microsoft.com/office/drawing/2014/main" id="{BDE78890-429C-45D0-90F5-F6AD6D355556}"/>
               </a:ext>
             </a:extLst>
           </p:cNvPr>
@@ -3354,7 +3567,7 @@
           <p:cNvPr id="6" name="Content Placeholder 5">
             <a:extLst xmlns:a="http://schemas.openxmlformats.org/drawingml/2006/main">
               <a:ext uri="{FF2B5EF4-FFF2-40B4-BE49-F238E27FC236}">
-                <a16:creationId xmlns:a16="http://schemas.microsoft.com/office/drawing/2014/main" id="{0D8CEA98-44B7-457E-B221-FF5375AE95FA}"/>
+                <a16:creationId xmlns:a16="http://schemas.microsoft.com/office/drawing/2014/main" id="{78B40C79-23A5-45B3-B869-50213D46D640}"/>
               </a:ext>
             </a:extLst>
           </p:cNvPr>
@@ -3458,7 +3671,7 @@
           <p:cNvPr id="7" name="Date Placeholder 6">
             <a:extLst xmlns:a="http://schemas.openxmlformats.org/drawingml/2006/main">
               <a:ext uri="{FF2B5EF4-FFF2-40B4-BE49-F238E27FC236}">
-                <a16:creationId xmlns:a16="http://schemas.microsoft.com/office/drawing/2014/main" id="{558F097D-C0B5-4F4B-9DFA-FB2E0FF33A95}"/>
+                <a16:creationId xmlns:a16="http://schemas.microsoft.com/office/drawing/2014/main" id="{219D603B-E582-4FB2-BAE4-61B1B6AE823D}"/>
               </a:ext>
             </a:extLst>
           </p:cNvPr>
@@ -3486,7 +3699,7 @@
           <p:cNvPr id="8" name="Footer Placeholder 7">
             <a:extLst xmlns:a="http://schemas.openxmlformats.org/drawingml/2006/main">
               <a:ext uri="{FF2B5EF4-FFF2-40B4-BE49-F238E27FC236}">
-                <a16:creationId xmlns:a16="http://schemas.microsoft.com/office/drawing/2014/main" id="{B92F9C0A-414E-458B-882D-FEFE50E69856}"/>
+                <a16:creationId xmlns:a16="http://schemas.microsoft.com/office/drawing/2014/main" id="{21DDF41D-E68C-4ACA-A461-C62CAEA6FB8A}"/>
               </a:ext>
             </a:extLst>
           </p:cNvPr>
@@ -3511,7 +3724,7 @@
           <p:cNvPr id="9" name="Slide Number Placeholder 8">
             <a:extLst xmlns:a="http://schemas.openxmlformats.org/drawingml/2006/main">
               <a:ext uri="{FF2B5EF4-FFF2-40B4-BE49-F238E27FC236}">
-                <a16:creationId xmlns:a16="http://schemas.microsoft.com/office/drawing/2014/main" id="{99466ACF-4CCD-4456-8C0F-20FD0494E4B6}"/>
+                <a16:creationId xmlns:a16="http://schemas.microsoft.com/office/drawing/2014/main" id="{FF104033-E490-4B54-A884-2B6CE35BD817}"/>
               </a:ext>
             </a:extLst>
           </p:cNvPr>
@@ -3556,7 +3769,7 @@
           <p:cNvPr id="2" name="Title 1">
             <a:extLst xmlns:a="http://schemas.openxmlformats.org/drawingml/2006/main">
               <a:ext uri="{FF2B5EF4-FFF2-40B4-BE49-F238E27FC236}">
-                <a16:creationId xmlns:a16="http://schemas.microsoft.com/office/drawing/2014/main" id="{0A4AF96B-CFB8-47A1-A7FF-33309FD19BA2}"/>
+                <a16:creationId xmlns:a16="http://schemas.microsoft.com/office/drawing/2014/main" id="{BE49F881-13DF-4EE2-80ED-26F5825198C1}"/>
               </a:ext>
             </a:extLst>
           </p:cNvPr>
@@ -3583,7 +3796,7 @@
           <p:cNvPr id="3" name="Date Placeholder 2">
             <a:extLst xmlns:a="http://schemas.openxmlformats.org/drawingml/2006/main">
               <a:ext uri="{FF2B5EF4-FFF2-40B4-BE49-F238E27FC236}">
-                <a16:creationId xmlns:a16="http://schemas.microsoft.com/office/drawing/2014/main" id="{6FB3A48D-C830-4BCB-B73A-DD9FBFB71695}"/>
+                <a16:creationId xmlns:a16="http://schemas.microsoft.com/office/drawing/2014/main" id="{E25B2DC3-3559-4D8F-BD03-CADA4DAEE101}"/>
               </a:ext>
             </a:extLst>
           </p:cNvPr>
@@ -3611,7 +3824,7 @@
           <p:cNvPr id="4" name="Footer Placeholder 3">
             <a:extLst xmlns:a="http://schemas.openxmlformats.org/drawingml/2006/main">
               <a:ext uri="{FF2B5EF4-FFF2-40B4-BE49-F238E27FC236}">
-                <a16:creationId xmlns:a16="http://schemas.microsoft.com/office/drawing/2014/main" id="{75A411FC-3A4F-4FA1-A3CF-21A2B66F56E5}"/>
+                <a16:creationId xmlns:a16="http://schemas.microsoft.com/office/drawing/2014/main" id="{02B7ED88-1079-467C-92BF-8BBA00F0DA80}"/>
               </a:ext>
             </a:extLst>
           </p:cNvPr>
@@ -3636,7 +3849,7 @@
           <p:cNvPr id="5" name="Slide Number Placeholder 4">
             <a:extLst xmlns:a="http://schemas.openxmlformats.org/drawingml/2006/main">
               <a:ext uri="{FF2B5EF4-FFF2-40B4-BE49-F238E27FC236}">
-                <a16:creationId xmlns:a16="http://schemas.microsoft.com/office/drawing/2014/main" id="{3A642CBB-CD49-4E8F-9CE4-0F1278B45525}"/>
+                <a16:creationId xmlns:a16="http://schemas.microsoft.com/office/drawing/2014/main" id="{8C0A1BA0-4500-4328-9321-F721C18A2A79}"/>
               </a:ext>
             </a:extLst>
           </p:cNvPr>
@@ -3681,7 +3894,7 @@
           <p:cNvPr id="2" name="Date Placeholder 1">
             <a:extLst xmlns:a="http://schemas.openxmlformats.org/drawingml/2006/main">
               <a:ext uri="{FF2B5EF4-FFF2-40B4-BE49-F238E27FC236}">
-                <a16:creationId xmlns:a16="http://schemas.microsoft.com/office/drawing/2014/main" id="{0FB8A3A4-D59F-40D2-BF40-8B0E1F134DB2}"/>
+                <a16:creationId xmlns:a16="http://schemas.microsoft.com/office/drawing/2014/main" id="{77D8DC42-249B-420E-A847-80F8F3E4EA8C}"/>
               </a:ext>
             </a:extLst>
           </p:cNvPr>
@@ -3709,7 +3922,7 @@
           <p:cNvPr id="3" name="Footer Placeholder 2">
             <a:extLst xmlns:a="http://schemas.openxmlformats.org/drawingml/2006/main">
               <a:ext uri="{FF2B5EF4-FFF2-40B4-BE49-F238E27FC236}">
-                <a16:creationId xmlns:a16="http://schemas.microsoft.com/office/drawing/2014/main" id="{CEB6DE01-53CE-4D7C-8BEB-A3BFBDD8CFD6}"/>
+                <a16:creationId xmlns:a16="http://schemas.microsoft.com/office/drawing/2014/main" id="{DEE18333-A36E-4A0E-A9E2-2BD02AD96A4F}"/>
               </a:ext>
             </a:extLst>
           </p:cNvPr>
@@ -3734,7 +3947,7 @@
           <p:cNvPr id="4" name="Slide Number Placeholder 3">
             <a:extLst xmlns:a="http://schemas.openxmlformats.org/drawingml/2006/main">
               <a:ext uri="{FF2B5EF4-FFF2-40B4-BE49-F238E27FC236}">
-                <a16:creationId xmlns:a16="http://schemas.microsoft.com/office/drawing/2014/main" id="{2E2F5388-3A64-47D5-A953-F02FEF9DDE8B}"/>
+                <a16:creationId xmlns:a16="http://schemas.microsoft.com/office/drawing/2014/main" id="{C2900628-4DEE-45B3-B9F0-D4A24FD0F846}"/>
               </a:ext>
             </a:extLst>
           </p:cNvPr>
@@ -3779,7 +3992,7 @@
           <p:cNvPr id="2" name="Title 1">
             <a:extLst xmlns:a="http://schemas.openxmlformats.org/drawingml/2006/main">
               <a:ext uri="{FF2B5EF4-FFF2-40B4-BE49-F238E27FC236}">
-                <a16:creationId xmlns:a16="http://schemas.microsoft.com/office/drawing/2014/main" id="{ACD4F121-E18E-4499-B83B-FF450CA10ACD}"/>
+                <a16:creationId xmlns:a16="http://schemas.microsoft.com/office/drawing/2014/main" id="{6C91D27A-C072-4765-9312-C37A332C96F8}"/>
               </a:ext>
             </a:extLst>
           </p:cNvPr>
@@ -3816,7 +4029,7 @@
           <p:cNvPr id="3" name="Content Placeholder 2">
             <a:extLst xmlns:a="http://schemas.openxmlformats.org/drawingml/2006/main">
               <a:ext uri="{FF2B5EF4-FFF2-40B4-BE49-F238E27FC236}">
-                <a16:creationId xmlns:a16="http://schemas.microsoft.com/office/drawing/2014/main" id="{2410285A-BF5A-4FBD-B2D5-04A7E7FE567E}"/>
+                <a16:creationId xmlns:a16="http://schemas.microsoft.com/office/drawing/2014/main" id="{6A5B232E-EDD6-437A-8522-241DF6F285D4}"/>
               </a:ext>
             </a:extLst>
           </p:cNvPr>
@@ -3920,7 +4133,7 @@
           <p:cNvPr id="4" name="Text Placeholder 3">
             <a:extLst xmlns:a="http://schemas.openxmlformats.org/drawingml/2006/main">
               <a:ext uri="{FF2B5EF4-FFF2-40B4-BE49-F238E27FC236}">
-                <a16:creationId xmlns:a16="http://schemas.microsoft.com/office/drawing/2014/main" id="{CE224013-664E-44B6-BCC9-F49CEEBB14AE}"/>
+                <a16:creationId xmlns:a16="http://schemas.microsoft.com/office/drawing/2014/main" id="{5F0774C1-2773-49C9-8D49-04ADBEA1D53C}"/>
               </a:ext>
             </a:extLst>
           </p:cNvPr>
@@ -3992,7 +4205,7 @@
           <p:cNvPr id="5" name="Date Placeholder 4">
             <a:extLst xmlns:a="http://schemas.openxmlformats.org/drawingml/2006/main">
               <a:ext uri="{FF2B5EF4-FFF2-40B4-BE49-F238E27FC236}">
-                <a16:creationId xmlns:a16="http://schemas.microsoft.com/office/drawing/2014/main" id="{EED66F92-6BFF-49B2-95A0-AB5AB1FB484F}"/>
+                <a16:creationId xmlns:a16="http://schemas.microsoft.com/office/drawing/2014/main" id="{4A0230DD-BE8D-4F76-A443-793EA773332A}"/>
               </a:ext>
             </a:extLst>
           </p:cNvPr>
@@ -4020,7 +4233,7 @@
           <p:cNvPr id="6" name="Footer Placeholder 5">
             <a:extLst xmlns:a="http://schemas.openxmlformats.org/drawingml/2006/main">
               <a:ext uri="{FF2B5EF4-FFF2-40B4-BE49-F238E27FC236}">
-                <a16:creationId xmlns:a16="http://schemas.microsoft.com/office/drawing/2014/main" id="{8F895CFA-B195-4A1D-9D5F-BF02743DD4E9}"/>
+                <a16:creationId xmlns:a16="http://schemas.microsoft.com/office/drawing/2014/main" id="{03E477C0-D995-4EA3-97E8-333D6D155B30}"/>
               </a:ext>
             </a:extLst>
           </p:cNvPr>
@@ -4045,7 +4258,7 @@
           <p:cNvPr id="7" name="Slide Number Placeholder 6">
             <a:extLst xmlns:a="http://schemas.openxmlformats.org/drawingml/2006/main">
               <a:ext uri="{FF2B5EF4-FFF2-40B4-BE49-F238E27FC236}">
-                <a16:creationId xmlns:a16="http://schemas.microsoft.com/office/drawing/2014/main" id="{3F093882-DAE0-4C3A-829E-9DE166620ED0}"/>
+                <a16:creationId xmlns:a16="http://schemas.microsoft.com/office/drawing/2014/main" id="{ED351480-4C11-4B68-88C8-817A1318F716}"/>
               </a:ext>
             </a:extLst>
           </p:cNvPr>
@@ -4090,7 +4303,7 @@
           <p:cNvPr id="2" name="Title 1">
             <a:extLst xmlns:a="http://schemas.openxmlformats.org/drawingml/2006/main">
               <a:ext uri="{FF2B5EF4-FFF2-40B4-BE49-F238E27FC236}">
-                <a16:creationId xmlns:a16="http://schemas.microsoft.com/office/drawing/2014/main" id="{4325D2CD-310B-44AE-9F4D-3485A3789613}"/>
+                <a16:creationId xmlns:a16="http://schemas.microsoft.com/office/drawing/2014/main" id="{2EAC5805-A4ED-44FF-9215-7B82B5ACAB9F}"/>
               </a:ext>
             </a:extLst>
           </p:cNvPr>
@@ -4127,7 +4340,7 @@
           <p:cNvPr id="3" name="Picture Placeholder 2">
             <a:extLst xmlns:a="http://schemas.openxmlformats.org/drawingml/2006/main">
               <a:ext uri="{FF2B5EF4-FFF2-40B4-BE49-F238E27FC236}">
-                <a16:creationId xmlns:a16="http://schemas.microsoft.com/office/drawing/2014/main" id="{12AF2B7F-F942-42E3-B73F-7F55384F9E56}"/>
+                <a16:creationId xmlns:a16="http://schemas.microsoft.com/office/drawing/2014/main" id="{CF825E54-9B6F-4E8D-ADCB-DBAFDBD0D0BE}"/>
               </a:ext>
             </a:extLst>
           </p:cNvPr>
@@ -4196,7 +4409,7 @@
           <p:cNvPr id="4" name="Text Placeholder 3">
             <a:extLst xmlns:a="http://schemas.openxmlformats.org/drawingml/2006/main">
               <a:ext uri="{FF2B5EF4-FFF2-40B4-BE49-F238E27FC236}">
-                <a16:creationId xmlns:a16="http://schemas.microsoft.com/office/drawing/2014/main" id="{E8448AD3-DDD8-4865-8BA1-128DD17D82A3}"/>
+                <a16:creationId xmlns:a16="http://schemas.microsoft.com/office/drawing/2014/main" id="{B3BE0461-4B88-4A06-8CCD-B397B242E429}"/>
               </a:ext>
             </a:extLst>
           </p:cNvPr>
@@ -4268,7 +4481,7 @@
           <p:cNvPr id="5" name="Date Placeholder 4">
             <a:extLst xmlns:a="http://schemas.openxmlformats.org/drawingml/2006/main">
               <a:ext uri="{FF2B5EF4-FFF2-40B4-BE49-F238E27FC236}">
-                <a16:creationId xmlns:a16="http://schemas.microsoft.com/office/drawing/2014/main" id="{6B73EFEC-869A-4752-B3A9-614A2B082F66}"/>
+                <a16:creationId xmlns:a16="http://schemas.microsoft.com/office/drawing/2014/main" id="{C6B70DA3-6796-4A46-9228-1B33481EAE14}"/>
               </a:ext>
             </a:extLst>
           </p:cNvPr>
@@ -4296,7 +4509,7 @@
           <p:cNvPr id="6" name="Footer Placeholder 5">
             <a:extLst xmlns:a="http://schemas.openxmlformats.org/drawingml/2006/main">
               <a:ext uri="{FF2B5EF4-FFF2-40B4-BE49-F238E27FC236}">
-                <a16:creationId xmlns:a16="http://schemas.microsoft.com/office/drawing/2014/main" id="{E844ABAC-8245-44C6-9BE4-9FD9B7C6D3E3}"/>
+                <a16:creationId xmlns:a16="http://schemas.microsoft.com/office/drawing/2014/main" id="{FE22E7B8-98F9-4E2C-86A3-C47F6FB2A244}"/>
               </a:ext>
             </a:extLst>
           </p:cNvPr>
@@ -4321,7 +4534,7 @@
           <p:cNvPr id="7" name="Slide Number Placeholder 6">
             <a:extLst xmlns:a="http://schemas.openxmlformats.org/drawingml/2006/main">
               <a:ext uri="{FF2B5EF4-FFF2-40B4-BE49-F238E27FC236}">
-                <a16:creationId xmlns:a16="http://schemas.microsoft.com/office/drawing/2014/main" id="{81AA1A13-8728-4B59-97A2-08C6F5F6D4E0}"/>
+                <a16:creationId xmlns:a16="http://schemas.microsoft.com/office/drawing/2014/main" id="{3FDFB0FD-FF4A-4BDB-9A66-08A4D5E90E32}"/>
               </a:ext>
             </a:extLst>
           </p:cNvPr>
@@ -4371,7 +4584,7 @@
           <p:cNvPr id="2" name="Title Placeholder 1">
             <a:extLst xmlns:a="http://schemas.openxmlformats.org/drawingml/2006/main">
               <a:ext uri="{FF2B5EF4-FFF2-40B4-BE49-F238E27FC236}">
-                <a16:creationId xmlns:a16="http://schemas.microsoft.com/office/drawing/2014/main" id="{51B6DE8A-5388-4540-B58D-49D317095CBA}"/>
+                <a16:creationId xmlns:a16="http://schemas.microsoft.com/office/drawing/2014/main" id="{E72D4D0A-59A6-417C-B183-9D27ABC22473}"/>
               </a:ext>
             </a:extLst>
           </p:cNvPr>
@@ -4406,7 +4619,7 @@
           <p:cNvPr id="3" name="Text Placeholder 2">
             <a:extLst xmlns:a="http://schemas.openxmlformats.org/drawingml/2006/main">
               <a:ext uri="{FF2B5EF4-FFF2-40B4-BE49-F238E27FC236}">
-                <a16:creationId xmlns:a16="http://schemas.microsoft.com/office/drawing/2014/main" id="{75D0F31D-4948-44A9-9278-2F1F28B8E9AA}"/>
+                <a16:creationId xmlns:a16="http://schemas.microsoft.com/office/drawing/2014/main" id="{14733D90-7828-47E5-82D8-C175FE8A8A47}"/>
               </a:ext>
             </a:extLst>
           </p:cNvPr>
@@ -4479,7 +4692,7 @@
           <p:cNvPr id="4" name="Date Placeholder 3">
             <a:extLst xmlns:a="http://schemas.openxmlformats.org/drawingml/2006/main">
               <a:ext uri="{FF2B5EF4-FFF2-40B4-BE49-F238E27FC236}">
-                <a16:creationId xmlns:a16="http://schemas.microsoft.com/office/drawing/2014/main" id="{EB5E12F3-5D05-4A1F-8BCE-BF46F1EEE968}"/>
+                <a16:creationId xmlns:a16="http://schemas.microsoft.com/office/drawing/2014/main" id="{198F2493-4276-4C59-84CE-32187AE2BC13}"/>
               </a:ext>
             </a:extLst>
           </p:cNvPr>
@@ -4526,7 +4739,7 @@
           <p:cNvPr id="5" name="Footer Placeholder 4">
             <a:extLst xmlns:a="http://schemas.openxmlformats.org/drawingml/2006/main">
               <a:ext uri="{FF2B5EF4-FFF2-40B4-BE49-F238E27FC236}">
-                <a16:creationId xmlns:a16="http://schemas.microsoft.com/office/drawing/2014/main" id="{48A69FF3-79BC-4852-803A-D4ED28292E52}"/>
+                <a16:creationId xmlns:a16="http://schemas.microsoft.com/office/drawing/2014/main" id="{F43F9313-888B-430F-B0F7-46A5CFD32077}"/>
               </a:ext>
             </a:extLst>
           </p:cNvPr>
@@ -4570,7 +4783,7 @@
           <p:cNvPr id="6" name="Slide Number Placeholder 5">
             <a:extLst xmlns:a="http://schemas.openxmlformats.org/drawingml/2006/main">
               <a:ext uri="{FF2B5EF4-FFF2-40B4-BE49-F238E27FC236}">
-                <a16:creationId xmlns:a16="http://schemas.microsoft.com/office/drawing/2014/main" id="{88506420-8C5A-49FF-A22E-6D1A753B08B0}"/>
+                <a16:creationId xmlns:a16="http://schemas.microsoft.com/office/drawing/2014/main" id="{E932969B-999E-4EA0-A8E7-C01E417F382A}"/>
               </a:ext>
             </a:extLst>
           </p:cNvPr>
@@ -4617,7 +4830,7 @@
           <p:cNvPr id="11" name="Picture 10">
             <a:extLst xmlns:a="http://schemas.openxmlformats.org/drawingml/2006/main">
               <a:ext uri="{FF2B5EF4-FFF2-40B4-BE49-F238E27FC236}">
-                <a16:creationId xmlns:a16="http://schemas.microsoft.com/office/drawing/2014/main" id="{4907B14A-A2D3-404D-8219-D5E7ED193C12}"/>
+                <a16:creationId xmlns:a16="http://schemas.microsoft.com/office/drawing/2014/main" id="{98082D64-B27B-4A15-9FAA-12D1576C8DD7}"/>
               </a:ext>
             </a:extLst>
           </p:cNvPr>
@@ -4627,7 +4840,7 @@
           <p:nvPr/>
         </p:nvPicPr>
         <p:blipFill>
-          <a:blip xmlns:r="http://schemas.openxmlformats.org/officeDocument/2006/relationships" xmlns:a="http://schemas.openxmlformats.org/drawingml/2006/main" r:embed="Rb0b65b4f9c99488f"/>
+          <a:blip xmlns:r="http://schemas.openxmlformats.org/officeDocument/2006/relationships" xmlns:a="http://schemas.openxmlformats.org/drawingml/2006/main" r:embed="Rbb1110d1bcbc47e4"/>
           <a:stretch xmlns:a="http://schemas.openxmlformats.org/drawingml/2006/main">
             <a:fillRect l="0" t="0" r="0" b="0"/>
           </a:stretch>
@@ -4646,17 +4859,17 @@
   </p:cSld>
   <p:clrMap bg1="lt1" tx1="dk1" bg2="lt2" tx2="dk2" accent1="accent1" accent2="accent2" accent3="accent3" accent4="accent4" accent5="accent5" accent6="accent6" hlink="hlink" folHlink="folHlink"/>
   <p:sldLayoutIdLst>
-    <p:sldLayoutId xmlns:r="http://schemas.openxmlformats.org/officeDocument/2006/relationships" id="2147483649" r:id="R5f57abc5b4d64a14"/>
-    <p:sldLayoutId xmlns:r="http://schemas.openxmlformats.org/officeDocument/2006/relationships" id="2147483650" r:id="R0de84cebab424b85"/>
-    <p:sldLayoutId xmlns:r="http://schemas.openxmlformats.org/officeDocument/2006/relationships" id="2147483651" r:id="R7aa80ca88d424137"/>
-    <p:sldLayoutId xmlns:r="http://schemas.openxmlformats.org/officeDocument/2006/relationships" id="2147483652" r:id="R7443c9d00cc44f88"/>
-    <p:sldLayoutId xmlns:r="http://schemas.openxmlformats.org/officeDocument/2006/relationships" id="2147483653" r:id="Rd383929cd23649e4"/>
-    <p:sldLayoutId xmlns:r="http://schemas.openxmlformats.org/officeDocument/2006/relationships" id="2147483654" r:id="R4803539d1bfd4009"/>
-    <p:sldLayoutId xmlns:r="http://schemas.openxmlformats.org/officeDocument/2006/relationships" id="2147483655" r:id="R215e94658da04e12"/>
-    <p:sldLayoutId xmlns:r="http://schemas.openxmlformats.org/officeDocument/2006/relationships" id="2147483656" r:id="Rf7f94876924b4229"/>
-    <p:sldLayoutId xmlns:r="http://schemas.openxmlformats.org/officeDocument/2006/relationships" id="2147483657" r:id="R487594cc49334d62"/>
-    <p:sldLayoutId xmlns:r="http://schemas.openxmlformats.org/officeDocument/2006/relationships" id="2147483658" r:id="R5bada2d4470549d2"/>
-    <p:sldLayoutId xmlns:r="http://schemas.openxmlformats.org/officeDocument/2006/relationships" id="2147483659" r:id="Rafa9141d3b1c4bb7"/>
+    <p:sldLayoutId xmlns:r="http://schemas.openxmlformats.org/officeDocument/2006/relationships" id="2147483649" r:id="R69e35eae91fb4fa4"/>
+    <p:sldLayoutId xmlns:r="http://schemas.openxmlformats.org/officeDocument/2006/relationships" id="2147483650" r:id="Rabbffce0835346c2"/>
+    <p:sldLayoutId xmlns:r="http://schemas.openxmlformats.org/officeDocument/2006/relationships" id="2147483651" r:id="Rb7f2bc527ee04dfa"/>
+    <p:sldLayoutId xmlns:r="http://schemas.openxmlformats.org/officeDocument/2006/relationships" id="2147483652" r:id="Red633aa1bf05416e"/>
+    <p:sldLayoutId xmlns:r="http://schemas.openxmlformats.org/officeDocument/2006/relationships" id="2147483653" r:id="R6cc830b00b6c47da"/>
+    <p:sldLayoutId xmlns:r="http://schemas.openxmlformats.org/officeDocument/2006/relationships" id="2147483654" r:id="R35f04902f3cb4bf4"/>
+    <p:sldLayoutId xmlns:r="http://schemas.openxmlformats.org/officeDocument/2006/relationships" id="2147483655" r:id="R6a3231f7fc544c8a"/>
+    <p:sldLayoutId xmlns:r="http://schemas.openxmlformats.org/officeDocument/2006/relationships" id="2147483656" r:id="R94a6536fab7b4d62"/>
+    <p:sldLayoutId xmlns:r="http://schemas.openxmlformats.org/officeDocument/2006/relationships" id="2147483657" r:id="R592b658a258e4b89"/>
+    <p:sldLayoutId xmlns:r="http://schemas.openxmlformats.org/officeDocument/2006/relationships" id="2147483658" r:id="R1979304ed99e459c"/>
+    <p:sldLayoutId xmlns:r="http://schemas.openxmlformats.org/officeDocument/2006/relationships" id="2147483659" r:id="Rbe0d2d92aebb4dc4"/>
   </p:sldLayoutIdLst>
   <p:txStyles>
     <p:titleStyle>
@@ -5280,7 +5493,7 @@
           <p:cNvPr id="2" name="Content Placeholder 2">
             <a:extLst xmlns:a="http://schemas.openxmlformats.org/drawingml/2006/main">
               <a:ext uri="{FF2B5EF4-FFF2-40B4-BE49-F238E27FC236}">
-                <a16:creationId xmlns:a16="http://schemas.microsoft.com/office/drawing/2014/main" id="{A1BF96DB-F990-4909-B26A-7B9C9E805A9F}"/>
+                <a16:creationId xmlns:a16="http://schemas.microsoft.com/office/drawing/2014/main" id="{F18BBF66-8A4E-4CCE-B48F-A983CA69D2CD}"/>
               </a:ext>
             </a:extLst>
           </p:cNvPr>
@@ -5300,7 +5513,7 @@
               <a:buNone/>
             </a:pPr>
             <a:r>
-              <a:t>Edit changes one row.</a:t>
+              <a:t>Remove the reset calls.</a:t>
             </a:r>
           </a:p>
           <a:p xmlns:a="http://schemas.openxmlformats.org/drawingml/2006/main">
@@ -5308,7 +5521,7 @@
               <a:buNone/>
             </a:pPr>
             <a:r>
-              <a:t>Delete removes one row without a reset.</a:t>
+              <a:t>Add still updates the screen.</a:t>
             </a:r>
           </a:p>
         </p:txBody>
@@ -5341,44 +5554,16 @@
           <a:lstStyle xmlns:a="http://schemas.openxmlformats.org/drawingml/2006/main"/>
           <a:p xmlns:a="http://schemas.openxmlformats.org/drawingml/2006/main">
             <a:r>
-              <a:t>Step 5 Check</a:t>
+              <a:t>Step 3: What changed?</a:t>
             </a:r>
             <a:endParaRPr/>
           </a:p>
         </p:txBody>
       </p:sp>
-      <p:pic>
-        <p:nvPicPr>
-          <p:cNvPr id="4" name="">
-            <a:extLst xmlns:a="http://schemas.openxmlformats.org/drawingml/2006/main">
-              <a:ext uri="{FF2B5EF4-FFF2-40B4-BE49-F238E27FC236}">
-                <a16:creationId xmlns:a16="http://schemas.microsoft.com/office/drawing/2014/main" id="{70BF5B77-729A-4DFD-9709-D161FA2B410E}"/>
-              </a:ext>
-            </a:extLst>
-          </p:cNvPr>
-          <p:cNvPicPr>
-            <a:picLocks xmlns:a="http://schemas.openxmlformats.org/drawingml/2006/main" noChangeAspect="1"/>
-          </p:cNvPicPr>
-          <p:nvPr/>
-        </p:nvPicPr>
-        <p:blipFill>
-          <a:blip xmlns:r="http://schemas.openxmlformats.org/officeDocument/2006/relationships" xmlns:a="http://schemas.openxmlformats.org/drawingml/2006/main" r:embed="Rf602b84136314ef3"/>
-          <a:stretch xmlns:a="http://schemas.openxmlformats.org/drawingml/2006/main"/>
-        </p:blipFill>
-        <p:spPr>
-          <a:xfrm xmlns:a="http://schemas.openxmlformats.org/drawingml/2006/main">
-            <a:off x="3133823" y="3190875"/>
-            <a:ext cx="5924355" cy="3048000"/>
-          </a:xfrm>
-          <a:prstGeom xmlns:a="http://schemas.openxmlformats.org/drawingml/2006/main" prst="rect">
-            <a:avLst/>
-          </a:prstGeom>
-        </p:spPr>
-      </p:pic>
     </p:spTree>
     <p:extLst>
       <p:ext uri="{BB962C8B-B14F-4D97-AF65-F5344CB8AC3E}">
-        <p14:creationId xmlns:p14="http://schemas.microsoft.com/office/powerpoint/2010/main" val="949291605"/>
+        <p14:creationId xmlns:p14="http://schemas.microsoft.com/office/powerpoint/2010/main" val="2058980136"/>
       </p:ext>
     </p:extLst>
   </p:cSld>
@@ -5402,7 +5587,7 @@
           <p:cNvPr id="2" name="Content Placeholder 2">
             <a:extLst xmlns:a="http://schemas.openxmlformats.org/drawingml/2006/main">
               <a:ext uri="{FF2B5EF4-FFF2-40B4-BE49-F238E27FC236}">
-                <a16:creationId xmlns:a16="http://schemas.microsoft.com/office/drawing/2014/main" id="{A1BF96DB-F990-4909-B26A-7B9C9E805A9F}"/>
+                <a16:creationId xmlns:a16="http://schemas.microsoft.com/office/drawing/2014/main" id="{F18BBF66-8A4E-4CCE-B48F-A983CA69D2CD}"/>
               </a:ext>
             </a:extLst>
           </p:cNvPr>
@@ -5422,7 +5607,7 @@
               <a:buNone/>
             </a:pPr>
             <a:r>
-              <a:t>Show the completed app workflow.</a:t>
+              <a:t>Edit replaces one item in the collection.</a:t>
             </a:r>
           </a:p>
           <a:p xmlns:a="http://schemas.openxmlformats.org/drawingml/2006/main">
@@ -5430,15 +5615,7 @@
               <a:buNone/>
             </a:pPr>
             <a:r>
-              <a:t>Explain which responsibility changed.</a:t>
-            </a:r>
-          </a:p>
-          <a:p xmlns:a="http://schemas.openxmlformats.org/drawingml/2006/main">
-            <a:pPr lvl="0">
-              <a:buNone/>
-            </a:pPr>
-            <a:r>
-              <a:t>Check the result before the next module.</a:t>
+              <a:t>Delete removes one item.</a:t>
             </a:r>
           </a:p>
         </p:txBody>
@@ -5471,7 +5648,7 @@
           <a:lstStyle xmlns:a="http://schemas.openxmlformats.org/drawingml/2006/main"/>
           <a:p xmlns:a="http://schemas.openxmlformats.org/drawingml/2006/main">
             <a:r>
-              <a:t>Module review</a:t>
+              <a:t>Step 5: Replace and remove</a:t>
             </a:r>
             <a:endParaRPr/>
           </a:p>
@@ -5480,7 +5657,333 @@
     </p:spTree>
     <p:extLst>
       <p:ext uri="{BB962C8B-B14F-4D97-AF65-F5344CB8AC3E}">
-        <p14:creationId xmlns:p14="http://schemas.microsoft.com/office/powerpoint/2010/main" val="856787208"/>
+        <p14:creationId xmlns:p14="http://schemas.microsoft.com/office/powerpoint/2010/main" val="40270278"/>
+      </p:ext>
+    </p:extLst>
+  </p:cSld>
+</p:sld>
+</file>
+
+<file path=ppt/slides/slide12.xml><?xml version="1.0" encoding="utf-8"?>
+<p:sld xmlns:p="http://schemas.openxmlformats.org/presentationml/2006/main">
+  <p:cSld>
+    <p:spTree>
+      <p:nvGrpSpPr>
+        <p:cNvPr id="1" name=""/>
+        <p:cNvGrpSpPr/>
+        <p:nvPr/>
+      </p:nvGrpSpPr>
+      <p:grpSpPr>
+        <a:xfrm xmlns:a="http://schemas.openxmlformats.org/drawingml/2006/main"/>
+      </p:grpSpPr>
+      <p:sp>
+        <p:nvSpPr>
+          <p:cNvPr id="2" name="Content Placeholder 2">
+            <a:extLst xmlns:a="http://schemas.openxmlformats.org/drawingml/2006/main">
+              <a:ext uri="{FF2B5EF4-FFF2-40B4-BE49-F238E27FC236}">
+                <a16:creationId xmlns:a16="http://schemas.microsoft.com/office/drawing/2014/main" id="{F18BBF66-8A4E-4CCE-B48F-A983CA69D2CD}"/>
+              </a:ext>
+            </a:extLst>
+          </p:cNvPr>
+          <p:cNvSpPr>
+            <a:spLocks xmlns:a="http://schemas.openxmlformats.org/drawingml/2006/main" noGrp="1"/>
+          </p:cNvSpPr>
+          <p:nvPr>
+            <p:ph idx="1"/>
+          </p:nvPr>
+        </p:nvSpPr>
+        <p:spPr/>
+        <p:txBody>
+          <a:bodyPr xmlns:a="http://schemas.openxmlformats.org/drawingml/2006/main"/>
+          <a:lstStyle xmlns:a="http://schemas.openxmlformats.org/drawingml/2006/main"/>
+          <a:p xmlns:a="http://schemas.openxmlformats.org/drawingml/2006/main">
+            <a:pPr lvl="0">
+              <a:buNone/>
+            </a:pPr>
+            <a:r>
+              <a:t>Edit changes one row.</a:t>
+            </a:r>
+          </a:p>
+          <a:p xmlns:a="http://schemas.openxmlformats.org/drawingml/2006/main">
+            <a:pPr lvl="0">
+              <a:buNone/>
+            </a:pPr>
+            <a:r>
+              <a:t>Delete removes one row without a reset.</a:t>
+            </a:r>
+          </a:p>
+        </p:txBody>
+      </p:sp>
+      <p:sp>
+        <p:nvSpPr>
+          <p:cNvPr id="3" name="Title Placeholder 1">
+            <a:extLst xmlns:a="http://schemas.openxmlformats.org/drawingml/2006/main">
+              <a:ext uri="{FF2B5EF4-FFF2-40B4-BE49-F238E27FC236}">
+                <a16:creationId xmlns:a16="http://schemas.microsoft.com/office/drawing/2014/main" id="{2DF4F548-EDEF-186D-6633-AF1ABC814BC1}"/>
+              </a:ext>
+            </a:extLst>
+          </p:cNvPr>
+          <p:cNvSpPr>
+            <a:spLocks xmlns:a="http://schemas.openxmlformats.org/drawingml/2006/main" noGrp="1"/>
+          </p:cNvSpPr>
+          <p:nvPr>
+            <p:ph type="title" idx="0"/>
+          </p:nvPr>
+        </p:nvSpPr>
+        <p:spPr>
+          <a:prstGeom xmlns:a="http://schemas.openxmlformats.org/drawingml/2006/main" prst="rect">
+            <a:avLst/>
+          </a:prstGeom>
+        </p:spPr>
+        <p:txBody>
+          <a:bodyPr xmlns:a="http://schemas.openxmlformats.org/drawingml/2006/main" vert="horz" lIns="91440" tIns="45720" rIns="91440" bIns="45720" anchor="ctr">
+            <a:normAutofit fontScale="100000"/>
+          </a:bodyPr>
+          <a:lstStyle xmlns:a="http://schemas.openxmlformats.org/drawingml/2006/main"/>
+          <a:p xmlns:a="http://schemas.openxmlformats.org/drawingml/2006/main">
+            <a:r>
+              <a:t>Step 5: What changed?</a:t>
+            </a:r>
+            <a:endParaRPr/>
+          </a:p>
+        </p:txBody>
+      </p:sp>
+      <p:pic>
+        <p:nvPicPr>
+          <p:cNvPr id="4" name="">
+            <a:extLst xmlns:a="http://schemas.openxmlformats.org/drawingml/2006/main">
+              <a:ext uri="{FF2B5EF4-FFF2-40B4-BE49-F238E27FC236}">
+                <a16:creationId xmlns:a16="http://schemas.microsoft.com/office/drawing/2014/main" id="{60A12F47-2E2A-45A8-911A-84D29130ED1C}"/>
+              </a:ext>
+            </a:extLst>
+          </p:cNvPr>
+          <p:cNvPicPr>
+            <a:picLocks xmlns:a="http://schemas.openxmlformats.org/drawingml/2006/main" noChangeAspect="1"/>
+          </p:cNvPicPr>
+          <p:nvPr/>
+        </p:nvPicPr>
+        <p:blipFill>
+          <a:blip xmlns:r="http://schemas.openxmlformats.org/officeDocument/2006/relationships" xmlns:a="http://schemas.openxmlformats.org/drawingml/2006/main" r:embed="Reaab02dd155e440f"/>
+          <a:stretch xmlns:a="http://schemas.openxmlformats.org/drawingml/2006/main"/>
+        </p:blipFill>
+        <p:spPr>
+          <a:xfrm xmlns:a="http://schemas.openxmlformats.org/drawingml/2006/main">
+            <a:off x="3133823" y="3190875"/>
+            <a:ext cx="5924355" cy="3048000"/>
+          </a:xfrm>
+          <a:prstGeom xmlns:a="http://schemas.openxmlformats.org/drawingml/2006/main" prst="rect">
+            <a:avLst/>
+          </a:prstGeom>
+        </p:spPr>
+      </p:pic>
+    </p:spTree>
+    <p:extLst>
+      <p:ext uri="{BB962C8B-B14F-4D97-AF65-F5344CB8AC3E}">
+        <p14:creationId xmlns:p14="http://schemas.microsoft.com/office/powerpoint/2010/main" val="717985443"/>
+      </p:ext>
+    </p:extLst>
+  </p:cSld>
+</p:sld>
+</file>
+
+<file path=ppt/slides/slide13.xml><?xml version="1.0" encoding="utf-8"?>
+<p:sld xmlns:p="http://schemas.openxmlformats.org/presentationml/2006/main">
+  <p:cSld>
+    <p:spTree>
+      <p:nvGrpSpPr>
+        <p:cNvPr id="1" name=""/>
+        <p:cNvGrpSpPr/>
+        <p:nvPr/>
+      </p:nvGrpSpPr>
+      <p:grpSpPr>
+        <a:xfrm xmlns:a="http://schemas.openxmlformats.org/drawingml/2006/main"/>
+      </p:grpSpPr>
+      <p:sp>
+        <p:nvSpPr>
+          <p:cNvPr id="2" name="Content Placeholder 2">
+            <a:extLst xmlns:a="http://schemas.openxmlformats.org/drawingml/2006/main">
+              <a:ext uri="{FF2B5EF4-FFF2-40B4-BE49-F238E27FC236}">
+                <a16:creationId xmlns:a16="http://schemas.microsoft.com/office/drawing/2014/main" id="{F18BBF66-8A4E-4CCE-B48F-A983CA69D2CD}"/>
+              </a:ext>
+            </a:extLst>
+          </p:cNvPr>
+          <p:cNvSpPr>
+            <a:spLocks xmlns:a="http://schemas.openxmlformats.org/drawingml/2006/main" noGrp="1"/>
+          </p:cNvSpPr>
+          <p:nvPr>
+            <p:ph idx="1"/>
+          </p:nvPr>
+        </p:nvSpPr>
+        <p:spPr/>
+        <p:txBody>
+          <a:bodyPr xmlns:a="http://schemas.openxmlformats.org/drawingml/2006/main"/>
+          <a:lstStyle xmlns:a="http://schemas.openxmlformats.org/drawingml/2006/main"/>
+          <a:p xmlns:a="http://schemas.openxmlformats.org/drawingml/2006/main">
+            <a:pPr lvl="0">
+              <a:buNone/>
+            </a:pPr>
+            <a:r>
+              <a:t>I can explain why ItemsSource resets were needed.</a:t>
+            </a:r>
+          </a:p>
+          <a:p xmlns:a="http://schemas.openxmlformats.org/drawingml/2006/main">
+            <a:pPr lvl="0">
+              <a:buNone/>
+            </a:pPr>
+            <a:r>
+              <a:t>I can name the changes ObservableCollection reports.</a:t>
+            </a:r>
+          </a:p>
+          <a:p xmlns:a="http://schemas.openxmlformats.org/drawingml/2006/main">
+            <a:pPr lvl="0">
+              <a:buNone/>
+            </a:pPr>
+            <a:r>
+              <a:t>I can check Add, Replace, and Remove on screen.</a:t>
+            </a:r>
+          </a:p>
+        </p:txBody>
+      </p:sp>
+      <p:sp>
+        <p:nvSpPr>
+          <p:cNvPr id="3" name="Title Placeholder 1">
+            <a:extLst xmlns:a="http://schemas.openxmlformats.org/drawingml/2006/main">
+              <a:ext uri="{FF2B5EF4-FFF2-40B4-BE49-F238E27FC236}">
+                <a16:creationId xmlns:a16="http://schemas.microsoft.com/office/drawing/2014/main" id="{2DF4F548-EDEF-186D-6633-AF1ABC814BC1}"/>
+              </a:ext>
+            </a:extLst>
+          </p:cNvPr>
+          <p:cNvSpPr>
+            <a:spLocks xmlns:a="http://schemas.openxmlformats.org/drawingml/2006/main" noGrp="1"/>
+          </p:cNvSpPr>
+          <p:nvPr>
+            <p:ph type="title" idx="0"/>
+          </p:nvPr>
+        </p:nvSpPr>
+        <p:spPr>
+          <a:prstGeom xmlns:a="http://schemas.openxmlformats.org/drawingml/2006/main" prst="rect">
+            <a:avLst/>
+          </a:prstGeom>
+        </p:spPr>
+        <p:txBody>
+          <a:bodyPr xmlns:a="http://schemas.openxmlformats.org/drawingml/2006/main" vert="horz" lIns="91440" tIns="45720" rIns="91440" bIns="45720" anchor="ctr">
+            <a:normAutofit fontScale="100000"/>
+          </a:bodyPr>
+          <a:lstStyle xmlns:a="http://schemas.openxmlformats.org/drawingml/2006/main"/>
+          <a:p xmlns:a="http://schemas.openxmlformats.org/drawingml/2006/main">
+            <a:r>
+              <a:t>What you can now explain</a:t>
+            </a:r>
+            <a:endParaRPr/>
+          </a:p>
+        </p:txBody>
+      </p:sp>
+    </p:spTree>
+    <p:extLst>
+      <p:ext uri="{BB962C8B-B14F-4D97-AF65-F5344CB8AC3E}">
+        <p14:creationId xmlns:p14="http://schemas.microsoft.com/office/powerpoint/2010/main" val="1663692438"/>
+      </p:ext>
+    </p:extLst>
+  </p:cSld>
+</p:sld>
+</file>
+
+<file path=ppt/slides/slide14.xml><?xml version="1.0" encoding="utf-8"?>
+<p:sld xmlns:p="http://schemas.openxmlformats.org/presentationml/2006/main">
+  <p:cSld>
+    <p:spTree>
+      <p:nvGrpSpPr>
+        <p:cNvPr id="1" name=""/>
+        <p:cNvGrpSpPr/>
+        <p:nvPr/>
+      </p:nvGrpSpPr>
+      <p:grpSpPr>
+        <a:xfrm xmlns:a="http://schemas.openxmlformats.org/drawingml/2006/main"/>
+      </p:grpSpPr>
+      <p:sp>
+        <p:nvSpPr>
+          <p:cNvPr id="2" name="Content Placeholder 2">
+            <a:extLst xmlns:a="http://schemas.openxmlformats.org/drawingml/2006/main">
+              <a:ext uri="{FF2B5EF4-FFF2-40B4-BE49-F238E27FC236}">
+                <a16:creationId xmlns:a16="http://schemas.microsoft.com/office/drawing/2014/main" id="{F18BBF66-8A4E-4CCE-B48F-A983CA69D2CD}"/>
+              </a:ext>
+            </a:extLst>
+          </p:cNvPr>
+          <p:cNvSpPr>
+            <a:spLocks xmlns:a="http://schemas.openxmlformats.org/drawingml/2006/main" noGrp="1"/>
+          </p:cNvSpPr>
+          <p:nvPr>
+            <p:ph idx="1"/>
+          </p:nvPr>
+        </p:nvSpPr>
+        <p:spPr/>
+        <p:txBody>
+          <a:bodyPr xmlns:a="http://schemas.openxmlformats.org/drawingml/2006/main"/>
+          <a:lstStyle xmlns:a="http://schemas.openxmlformats.org/drawingml/2006/main"/>
+          <a:p xmlns:a="http://schemas.openxmlformats.org/drawingml/2006/main">
+            <a:pPr lvl="0">
+              <a:buNone/>
+            </a:pPr>
+            <a:r>
+              <a:t>CollectionView data updates</a:t>
+            </a:r>
+          </a:p>
+          <a:p xmlns:a="http://schemas.openxmlformats.org/drawingml/2006/main">
+            <a:pPr lvl="0">
+              <a:buNone/>
+            </a:pPr>
+            <a:r>
+              <a:t>Search Microsoft Learn for this topic.</a:t>
+            </a:r>
+          </a:p>
+          <a:p xmlns:a="http://schemas.openxmlformats.org/drawingml/2006/main">
+            <a:pPr lvl="0">
+              <a:buNone/>
+            </a:pPr>
+            <a:r>
+              <a:t>Try one example in a small test page.</a:t>
+            </a:r>
+          </a:p>
+        </p:txBody>
+      </p:sp>
+      <p:sp>
+        <p:nvSpPr>
+          <p:cNvPr id="3" name="Title Placeholder 1">
+            <a:extLst xmlns:a="http://schemas.openxmlformats.org/drawingml/2006/main">
+              <a:ext uri="{FF2B5EF4-FFF2-40B4-BE49-F238E27FC236}">
+                <a16:creationId xmlns:a16="http://schemas.microsoft.com/office/drawing/2014/main" id="{2DF4F548-EDEF-186D-6633-AF1ABC814BC1}"/>
+              </a:ext>
+            </a:extLst>
+          </p:cNvPr>
+          <p:cNvSpPr>
+            <a:spLocks xmlns:a="http://schemas.openxmlformats.org/drawingml/2006/main" noGrp="1"/>
+          </p:cNvSpPr>
+          <p:nvPr>
+            <p:ph type="title" idx="0"/>
+          </p:nvPr>
+        </p:nvSpPr>
+        <p:spPr>
+          <a:prstGeom xmlns:a="http://schemas.openxmlformats.org/drawingml/2006/main" prst="rect">
+            <a:avLst/>
+          </a:prstGeom>
+        </p:spPr>
+        <p:txBody>
+          <a:bodyPr xmlns:a="http://schemas.openxmlformats.org/drawingml/2006/main" vert="horz" lIns="91440" tIns="45720" rIns="91440" bIns="45720" anchor="ctr">
+            <a:normAutofit fontScale="100000"/>
+          </a:bodyPr>
+          <a:lstStyle xmlns:a="http://schemas.openxmlformats.org/drawingml/2006/main"/>
+          <a:p xmlns:a="http://schemas.openxmlformats.org/drawingml/2006/main">
+            <a:r>
+              <a:t>Read more in MAUI documentation</a:t>
+            </a:r>
+            <a:endParaRPr/>
+          </a:p>
+        </p:txBody>
+      </p:sp>
+    </p:spTree>
+    <p:extLst>
+      <p:ext uri="{BB962C8B-B14F-4D97-AF65-F5344CB8AC3E}">
+        <p14:creationId xmlns:p14="http://schemas.microsoft.com/office/powerpoint/2010/main" val="1408039475"/>
       </p:ext>
     </p:extLst>
   </p:cSld>
@@ -5504,7 +6007,7 @@
           <p:cNvPr id="2" name="Content Placeholder 2">
             <a:extLst xmlns:a="http://schemas.openxmlformats.org/drawingml/2006/main">
               <a:ext uri="{FF2B5EF4-FFF2-40B4-BE49-F238E27FC236}">
-                <a16:creationId xmlns:a16="http://schemas.microsoft.com/office/drawing/2014/main" id="{A1BF96DB-F990-4909-B26A-7B9C9E805A9F}"/>
+                <a16:creationId xmlns:a16="http://schemas.microsoft.com/office/drawing/2014/main" id="{F18BBF66-8A4E-4CCE-B48F-A983CA69D2CD}"/>
               </a:ext>
             </a:extLst>
           </p:cNvPr>
@@ -5573,7 +6076,7 @@
           <a:lstStyle xmlns:a="http://schemas.openxmlformats.org/drawingml/2006/main"/>
           <a:p xmlns:a="http://schemas.openxmlformats.org/drawingml/2006/main">
             <a:r>
-              <a:t>Exercise overview</a:t>
+              <a:t>What you will build</a:t>
             </a:r>
             <a:endParaRPr/>
           </a:p>
@@ -5582,7 +6085,7 @@
     </p:spTree>
     <p:extLst>
       <p:ext uri="{BB962C8B-B14F-4D97-AF65-F5344CB8AC3E}">
-        <p14:creationId xmlns:p14="http://schemas.microsoft.com/office/powerpoint/2010/main" val="2009573373"/>
+        <p14:creationId xmlns:p14="http://schemas.microsoft.com/office/powerpoint/2010/main" val="1200060378"/>
       </p:ext>
     </p:extLst>
   </p:cSld>
@@ -5606,7 +6109,7 @@
           <p:cNvPr id="2" name="Content Placeholder 2">
             <a:extLst xmlns:a="http://schemas.openxmlformats.org/drawingml/2006/main">
               <a:ext uri="{FF2B5EF4-FFF2-40B4-BE49-F238E27FC236}">
-                <a16:creationId xmlns:a16="http://schemas.microsoft.com/office/drawing/2014/main" id="{A1BF96DB-F990-4909-B26A-7B9C9E805A9F}"/>
+                <a16:creationId xmlns:a16="http://schemas.microsoft.com/office/drawing/2014/main" id="{F18BBF66-8A4E-4CCE-B48F-A983CA69D2CD}"/>
               </a:ext>
             </a:extLst>
           </p:cNvPr>
@@ -5626,7 +6129,7 @@
               <a:buNone/>
             </a:pPr>
             <a:r>
-              <a:t>List changes do not refresh this List by themselves.</a:t>
+              <a:t>List&lt;T&gt; stores items but sends no change event.</a:t>
             </a:r>
           </a:p>
           <a:p xmlns:a="http://schemas.openxmlformats.org/drawingml/2006/main">
@@ -5634,7 +6137,15 @@
               <a:buNone/>
             </a:pPr>
             <a:r>
-              <a:t>The page resets ItemsSource after each change.</a:t>
+              <a:t>ObservableCollection&lt;T&gt; reports Add and Remove.</a:t>
+            </a:r>
+          </a:p>
+          <a:p xmlns:a="http://schemas.openxmlformats.org/drawingml/2006/main">
+            <a:pPr lvl="0">
+              <a:buNone/>
+            </a:pPr>
+            <a:r>
+              <a:t>CollectionView uses those reports to update rows.</a:t>
             </a:r>
           </a:p>
         </p:txBody>
@@ -5662,21 +6173,49 @@
         </p:spPr>
         <p:txBody>
           <a:bodyPr xmlns:a="http://schemas.openxmlformats.org/drawingml/2006/main" vert="horz" lIns="91440" tIns="45720" rIns="91440" bIns="45720" anchor="ctr">
-            <a:normAutofit fontScale="100000"/>
+            <a:normAutofit fontScale="90278"/>
           </a:bodyPr>
           <a:lstStyle xmlns:a="http://schemas.openxmlformats.org/drawingml/2006/main"/>
           <a:p xmlns:a="http://schemas.openxmlformats.org/drawingml/2006/main">
             <a:r>
-              <a:t>Step 1 Manual refresh</a:t>
+              <a:t>The collection tells the view what changed</a:t>
             </a:r>
             <a:endParaRPr/>
           </a:p>
         </p:txBody>
       </p:sp>
+      <p:pic>
+        <p:nvPicPr>
+          <p:cNvPr id="4" name="">
+            <a:extLst xmlns:a="http://schemas.openxmlformats.org/drawingml/2006/main">
+              <a:ext uri="{FF2B5EF4-FFF2-40B4-BE49-F238E27FC236}">
+                <a16:creationId xmlns:a16="http://schemas.microsoft.com/office/drawing/2014/main" id="{BEAABBDA-02D7-4573-B420-3AE9F31A7FCD}"/>
+              </a:ext>
+            </a:extLst>
+          </p:cNvPr>
+          <p:cNvPicPr>
+            <a:picLocks xmlns:a="http://schemas.openxmlformats.org/drawingml/2006/main" noChangeAspect="1"/>
+          </p:cNvPicPr>
+          <p:nvPr/>
+        </p:nvPicPr>
+        <p:blipFill>
+          <a:blip xmlns:r="http://schemas.openxmlformats.org/officeDocument/2006/relationships" xmlns:a="http://schemas.openxmlformats.org/drawingml/2006/main" r:embed="Rf35999e5092441e0"/>
+          <a:stretch xmlns:a="http://schemas.openxmlformats.org/drawingml/2006/main"/>
+        </p:blipFill>
+        <p:spPr>
+          <a:xfrm xmlns:a="http://schemas.openxmlformats.org/drawingml/2006/main">
+            <a:off x="3133823" y="3190875"/>
+            <a:ext cx="5924355" cy="3048000"/>
+          </a:xfrm>
+          <a:prstGeom xmlns:a="http://schemas.openxmlformats.org/drawingml/2006/main" prst="rect">
+            <a:avLst/>
+          </a:prstGeom>
+        </p:spPr>
+      </p:pic>
     </p:spTree>
     <p:extLst>
       <p:ext uri="{BB962C8B-B14F-4D97-AF65-F5344CB8AC3E}">
-        <p14:creationId xmlns:p14="http://schemas.microsoft.com/office/powerpoint/2010/main" val="1411722657"/>
+        <p14:creationId xmlns:p14="http://schemas.microsoft.com/office/powerpoint/2010/main" val="2008714583"/>
       </p:ext>
     </p:extLst>
   </p:cSld>
@@ -5700,7 +6239,7 @@
           <p:cNvPr id="2" name="Content Placeholder 2">
             <a:extLst xmlns:a="http://schemas.openxmlformats.org/drawingml/2006/main">
               <a:ext uri="{FF2B5EF4-FFF2-40B4-BE49-F238E27FC236}">
-                <a16:creationId xmlns:a16="http://schemas.microsoft.com/office/drawing/2014/main" id="{A1BF96DB-F990-4909-B26A-7B9C9E805A9F}"/>
+                <a16:creationId xmlns:a16="http://schemas.microsoft.com/office/drawing/2014/main" id="{F18BBF66-8A4E-4CCE-B48F-A983CA69D2CD}"/>
               </a:ext>
             </a:extLst>
           </p:cNvPr>
@@ -5720,7 +6259,7 @@
               <a:buNone/>
             </a:pPr>
             <a:r>
-              <a:t>Find each manual refresh call.</a:t>
+              <a:t>A collection change differs from a property change.</a:t>
             </a:r>
           </a:p>
           <a:p xmlns:a="http://schemas.openxmlformats.org/drawingml/2006/main">
@@ -5728,7 +6267,15 @@
               <a:buNone/>
             </a:pPr>
             <a:r>
-              <a:t>Explain why the page needs it.</a:t>
+              <a:t>Replacing an item reports a row change.</a:t>
+            </a:r>
+          </a:p>
+          <a:p xmlns:a="http://schemas.openxmlformats.org/drawingml/2006/main">
+            <a:pPr lvl="0">
+              <a:buNone/>
+            </a:pPr>
+            <a:r>
+              <a:t>An item’s own properties need their own notifications.</a:t>
             </a:r>
           </a:p>
         </p:txBody>
@@ -5761,44 +6308,16 @@
           <a:lstStyle xmlns:a="http://schemas.openxmlformats.org/drawingml/2006/main"/>
           <a:p xmlns:a="http://schemas.openxmlformats.org/drawingml/2006/main">
             <a:r>
-              <a:t>Step 1 Check</a:t>
+              <a:t>From C# to the screen</a:t>
             </a:r>
             <a:endParaRPr/>
           </a:p>
         </p:txBody>
       </p:sp>
-      <p:pic>
-        <p:nvPicPr>
-          <p:cNvPr id="4" name="">
-            <a:extLst xmlns:a="http://schemas.openxmlformats.org/drawingml/2006/main">
-              <a:ext uri="{FF2B5EF4-FFF2-40B4-BE49-F238E27FC236}">
-                <a16:creationId xmlns:a16="http://schemas.microsoft.com/office/drawing/2014/main" id="{606DEE7D-73CC-47C4-87BE-B245EB53D65A}"/>
-              </a:ext>
-            </a:extLst>
-          </p:cNvPr>
-          <p:cNvPicPr>
-            <a:picLocks xmlns:a="http://schemas.openxmlformats.org/drawingml/2006/main" noChangeAspect="1"/>
-          </p:cNvPicPr>
-          <p:nvPr/>
-        </p:nvPicPr>
-        <p:blipFill>
-          <a:blip xmlns:r="http://schemas.openxmlformats.org/officeDocument/2006/relationships" xmlns:a="http://schemas.openxmlformats.org/drawingml/2006/main" r:embed="Rf3057b33a0b742bf"/>
-          <a:stretch xmlns:a="http://schemas.openxmlformats.org/drawingml/2006/main"/>
-        </p:blipFill>
-        <p:spPr>
-          <a:xfrm xmlns:a="http://schemas.openxmlformats.org/drawingml/2006/main">
-            <a:off x="3133823" y="3190875"/>
-            <a:ext cx="5924355" cy="3048000"/>
-          </a:xfrm>
-          <a:prstGeom xmlns:a="http://schemas.openxmlformats.org/drawingml/2006/main" prst="rect">
-            <a:avLst/>
-          </a:prstGeom>
-        </p:spPr>
-      </p:pic>
     </p:spTree>
     <p:extLst>
       <p:ext uri="{BB962C8B-B14F-4D97-AF65-F5344CB8AC3E}">
-        <p14:creationId xmlns:p14="http://schemas.microsoft.com/office/powerpoint/2010/main" val="1410562031"/>
+        <p14:creationId xmlns:p14="http://schemas.microsoft.com/office/powerpoint/2010/main" val="623573867"/>
       </p:ext>
     </p:extLst>
   </p:cSld>
@@ -5822,7 +6341,7 @@
           <p:cNvPr id="2" name="Content Placeholder 2">
             <a:extLst xmlns:a="http://schemas.openxmlformats.org/drawingml/2006/main">
               <a:ext uri="{FF2B5EF4-FFF2-40B4-BE49-F238E27FC236}">
-                <a16:creationId xmlns:a16="http://schemas.microsoft.com/office/drawing/2014/main" id="{A1BF96DB-F990-4909-B26A-7B9C9E805A9F}"/>
+                <a16:creationId xmlns:a16="http://schemas.microsoft.com/office/drawing/2014/main" id="{F18BBF66-8A4E-4CCE-B48F-A983CA69D2CD}"/>
               </a:ext>
             </a:extLst>
           </p:cNvPr>
@@ -5842,7 +6361,7 @@
               <a:buNone/>
             </a:pPr>
             <a:r>
-              <a:t>ObservableCollection reports Add, Replace, and Remove.</a:t>
+              <a:t>List changes do not refresh this List by themselves.</a:t>
             </a:r>
           </a:p>
           <a:p xmlns:a="http://schemas.openxmlformats.org/drawingml/2006/main">
@@ -5850,7 +6369,7 @@
               <a:buNone/>
             </a:pPr>
             <a:r>
-              <a:t>CollectionView listens to these reports.</a:t>
+              <a:t>The page resets ItemsSource after each change.</a:t>
             </a:r>
           </a:p>
         </p:txBody>
@@ -5883,7 +6402,7 @@
           <a:lstStyle xmlns:a="http://schemas.openxmlformats.org/drawingml/2006/main"/>
           <a:p xmlns:a="http://schemas.openxmlformats.org/drawingml/2006/main">
             <a:r>
-              <a:t>Step 2 Collection changes</a:t>
+              <a:t>Step 1: Manual refresh</a:t>
             </a:r>
             <a:endParaRPr/>
           </a:p>
@@ -5892,7 +6411,7 @@
     </p:spTree>
     <p:extLst>
       <p:ext uri="{BB962C8B-B14F-4D97-AF65-F5344CB8AC3E}">
-        <p14:creationId xmlns:p14="http://schemas.microsoft.com/office/powerpoint/2010/main" val="1037974139"/>
+        <p14:creationId xmlns:p14="http://schemas.microsoft.com/office/powerpoint/2010/main" val="495918444"/>
       </p:ext>
     </p:extLst>
   </p:cSld>
@@ -5916,7 +6435,7 @@
           <p:cNvPr id="2" name="Content Placeholder 2">
             <a:extLst xmlns:a="http://schemas.openxmlformats.org/drawingml/2006/main">
               <a:ext uri="{FF2B5EF4-FFF2-40B4-BE49-F238E27FC236}">
-                <a16:creationId xmlns:a16="http://schemas.microsoft.com/office/drawing/2014/main" id="{A1BF96DB-F990-4909-B26A-7B9C9E805A9F}"/>
+                <a16:creationId xmlns:a16="http://schemas.microsoft.com/office/drawing/2014/main" id="{F18BBF66-8A4E-4CCE-B48F-A983CA69D2CD}"/>
               </a:ext>
             </a:extLst>
           </p:cNvPr>
@@ -5936,7 +6455,7 @@
               <a:buNone/>
             </a:pPr>
             <a:r>
-              <a:t>A new row appears without a reset.</a:t>
+              <a:t>Find each manual refresh call.</a:t>
             </a:r>
           </a:p>
           <a:p xmlns:a="http://schemas.openxmlformats.org/drawingml/2006/main">
@@ -5944,7 +6463,7 @@
               <a:buNone/>
             </a:pPr>
             <a:r>
-              <a:t>The page still binds to Items.</a:t>
+              <a:t>Explain why the page needs it.</a:t>
             </a:r>
           </a:p>
         </p:txBody>
@@ -5977,44 +6496,16 @@
           <a:lstStyle xmlns:a="http://schemas.openxmlformats.org/drawingml/2006/main"/>
           <a:p xmlns:a="http://schemas.openxmlformats.org/drawingml/2006/main">
             <a:r>
-              <a:t>Step 2 Check</a:t>
+              <a:t>Step 1: What changed?</a:t>
             </a:r>
             <a:endParaRPr/>
           </a:p>
         </p:txBody>
       </p:sp>
-      <p:pic>
-        <p:nvPicPr>
-          <p:cNvPr id="4" name="">
-            <a:extLst xmlns:a="http://schemas.openxmlformats.org/drawingml/2006/main">
-              <a:ext uri="{FF2B5EF4-FFF2-40B4-BE49-F238E27FC236}">
-                <a16:creationId xmlns:a16="http://schemas.microsoft.com/office/drawing/2014/main" id="{45CC4FDE-0D05-4CB9-9DB4-19C652911BD4}"/>
-              </a:ext>
-            </a:extLst>
-          </p:cNvPr>
-          <p:cNvPicPr>
-            <a:picLocks xmlns:a="http://schemas.openxmlformats.org/drawingml/2006/main" noChangeAspect="1"/>
-          </p:cNvPicPr>
-          <p:nvPr/>
-        </p:nvPicPr>
-        <p:blipFill>
-          <a:blip xmlns:r="http://schemas.openxmlformats.org/officeDocument/2006/relationships" xmlns:a="http://schemas.openxmlformats.org/drawingml/2006/main" r:embed="R6582f1f49c534ff3"/>
-          <a:stretch xmlns:a="http://schemas.openxmlformats.org/drawingml/2006/main"/>
-        </p:blipFill>
-        <p:spPr>
-          <a:xfrm xmlns:a="http://schemas.openxmlformats.org/drawingml/2006/main">
-            <a:off x="3133823" y="3190875"/>
-            <a:ext cx="5924355" cy="3048000"/>
-          </a:xfrm>
-          <a:prstGeom xmlns:a="http://schemas.openxmlformats.org/drawingml/2006/main" prst="rect">
-            <a:avLst/>
-          </a:prstGeom>
-        </p:spPr>
-      </p:pic>
     </p:spTree>
     <p:extLst>
       <p:ext uri="{BB962C8B-B14F-4D97-AF65-F5344CB8AC3E}">
-        <p14:creationId xmlns:p14="http://schemas.microsoft.com/office/powerpoint/2010/main" val="2020560162"/>
+        <p14:creationId xmlns:p14="http://schemas.microsoft.com/office/powerpoint/2010/main" val="1675631797"/>
       </p:ext>
     </p:extLst>
   </p:cSld>
@@ -6038,7 +6529,7 @@
           <p:cNvPr id="2" name="Content Placeholder 2">
             <a:extLst xmlns:a="http://schemas.openxmlformats.org/drawingml/2006/main">
               <a:ext uri="{FF2B5EF4-FFF2-40B4-BE49-F238E27FC236}">
-                <a16:creationId xmlns:a16="http://schemas.microsoft.com/office/drawing/2014/main" id="{A1BF96DB-F990-4909-B26A-7B9C9E805A9F}"/>
+                <a16:creationId xmlns:a16="http://schemas.microsoft.com/office/drawing/2014/main" id="{F18BBF66-8A4E-4CCE-B48F-A983CA69D2CD}"/>
               </a:ext>
             </a:extLst>
           </p:cNvPr>
@@ -6058,7 +6549,7 @@
               <a:buNone/>
             </a:pPr>
             <a:r>
-              <a:t>The collection now reports list changes.</a:t>
+              <a:t>ObservableCollection reports Add, Replace, and Remove.</a:t>
             </a:r>
           </a:p>
           <a:p xmlns:a="http://schemas.openxmlformats.org/drawingml/2006/main">
@@ -6066,7 +6557,7 @@
               <a:buNone/>
             </a:pPr>
             <a:r>
-              <a:t>The old page refresh code has no job.</a:t>
+              <a:t>CollectionView listens to these reports.</a:t>
             </a:r>
           </a:p>
         </p:txBody>
@@ -6099,7 +6590,7 @@
           <a:lstStyle xmlns:a="http://schemas.openxmlformats.org/drawingml/2006/main"/>
           <a:p xmlns:a="http://schemas.openxmlformats.org/drawingml/2006/main">
             <a:r>
-              <a:t>Step 3 Remove the bridge</a:t>
+              <a:t>Step 2: Collection changes</a:t>
             </a:r>
             <a:endParaRPr/>
           </a:p>
@@ -6108,7 +6599,7 @@
     </p:spTree>
     <p:extLst>
       <p:ext uri="{BB962C8B-B14F-4D97-AF65-F5344CB8AC3E}">
-        <p14:creationId xmlns:p14="http://schemas.microsoft.com/office/powerpoint/2010/main" val="795676629"/>
+        <p14:creationId xmlns:p14="http://schemas.microsoft.com/office/powerpoint/2010/main" val="793891746"/>
       </p:ext>
     </p:extLst>
   </p:cSld>
@@ -6132,7 +6623,7 @@
           <p:cNvPr id="2" name="Content Placeholder 2">
             <a:extLst xmlns:a="http://schemas.openxmlformats.org/drawingml/2006/main">
               <a:ext uri="{FF2B5EF4-FFF2-40B4-BE49-F238E27FC236}">
-                <a16:creationId xmlns:a16="http://schemas.microsoft.com/office/drawing/2014/main" id="{A1BF96DB-F990-4909-B26A-7B9C9E805A9F}"/>
+                <a16:creationId xmlns:a16="http://schemas.microsoft.com/office/drawing/2014/main" id="{F18BBF66-8A4E-4CCE-B48F-A983CA69D2CD}"/>
               </a:ext>
             </a:extLst>
           </p:cNvPr>
@@ -6152,7 +6643,7 @@
               <a:buNone/>
             </a:pPr>
             <a:r>
-              <a:t>Remove the reset calls.</a:t>
+              <a:t>A new row appears without a reset.</a:t>
             </a:r>
           </a:p>
           <a:p xmlns:a="http://schemas.openxmlformats.org/drawingml/2006/main">
@@ -6160,7 +6651,7 @@
               <a:buNone/>
             </a:pPr>
             <a:r>
-              <a:t>Add still updates the screen.</a:t>
+              <a:t>The page still binds to Items.</a:t>
             </a:r>
           </a:p>
         </p:txBody>
@@ -6193,16 +6684,44 @@
           <a:lstStyle xmlns:a="http://schemas.openxmlformats.org/drawingml/2006/main"/>
           <a:p xmlns:a="http://schemas.openxmlformats.org/drawingml/2006/main">
             <a:r>
-              <a:t>Step 3 Check</a:t>
+              <a:t>Step 2: What changed?</a:t>
             </a:r>
             <a:endParaRPr/>
           </a:p>
         </p:txBody>
       </p:sp>
+      <p:pic>
+        <p:nvPicPr>
+          <p:cNvPr id="4" name="">
+            <a:extLst xmlns:a="http://schemas.openxmlformats.org/drawingml/2006/main">
+              <a:ext uri="{FF2B5EF4-FFF2-40B4-BE49-F238E27FC236}">
+                <a16:creationId xmlns:a16="http://schemas.microsoft.com/office/drawing/2014/main" id="{204F86A5-CF15-4520-8CC7-E7230BAB24C7}"/>
+              </a:ext>
+            </a:extLst>
+          </p:cNvPr>
+          <p:cNvPicPr>
+            <a:picLocks xmlns:a="http://schemas.openxmlformats.org/drawingml/2006/main" noChangeAspect="1"/>
+          </p:cNvPicPr>
+          <p:nvPr/>
+        </p:nvPicPr>
+        <p:blipFill>
+          <a:blip xmlns:r="http://schemas.openxmlformats.org/officeDocument/2006/relationships" xmlns:a="http://schemas.openxmlformats.org/drawingml/2006/main" r:embed="Rde357baf6ce34469"/>
+          <a:stretch xmlns:a="http://schemas.openxmlformats.org/drawingml/2006/main"/>
+        </p:blipFill>
+        <p:spPr>
+          <a:xfrm xmlns:a="http://schemas.openxmlformats.org/drawingml/2006/main">
+            <a:off x="3133823" y="3190875"/>
+            <a:ext cx="5924355" cy="3048000"/>
+          </a:xfrm>
+          <a:prstGeom xmlns:a="http://schemas.openxmlformats.org/drawingml/2006/main" prst="rect">
+            <a:avLst/>
+          </a:prstGeom>
+        </p:spPr>
+      </p:pic>
     </p:spTree>
     <p:extLst>
       <p:ext uri="{BB962C8B-B14F-4D97-AF65-F5344CB8AC3E}">
-        <p14:creationId xmlns:p14="http://schemas.microsoft.com/office/powerpoint/2010/main" val="480573847"/>
+        <p14:creationId xmlns:p14="http://schemas.microsoft.com/office/powerpoint/2010/main" val="1977641329"/>
       </p:ext>
     </p:extLst>
   </p:cSld>
@@ -6226,7 +6745,7 @@
           <p:cNvPr id="2" name="Content Placeholder 2">
             <a:extLst xmlns:a="http://schemas.openxmlformats.org/drawingml/2006/main">
               <a:ext uri="{FF2B5EF4-FFF2-40B4-BE49-F238E27FC236}">
-                <a16:creationId xmlns:a16="http://schemas.microsoft.com/office/drawing/2014/main" id="{A1BF96DB-F990-4909-B26A-7B9C9E805A9F}"/>
+                <a16:creationId xmlns:a16="http://schemas.microsoft.com/office/drawing/2014/main" id="{F18BBF66-8A4E-4CCE-B48F-A983CA69D2CD}"/>
               </a:ext>
             </a:extLst>
           </p:cNvPr>
@@ -6246,7 +6765,7 @@
               <a:buNone/>
             </a:pPr>
             <a:r>
-              <a:t>Edit replaces one item in the collection.</a:t>
+              <a:t>The collection now reports list changes.</a:t>
             </a:r>
           </a:p>
           <a:p xmlns:a="http://schemas.openxmlformats.org/drawingml/2006/main">
@@ -6254,7 +6773,7 @@
               <a:buNone/>
             </a:pPr>
             <a:r>
-              <a:t>Delete removes one item.</a:t>
+              <a:t>The old page refresh code has no job.</a:t>
             </a:r>
           </a:p>
         </p:txBody>
@@ -6287,7 +6806,7 @@
           <a:lstStyle xmlns:a="http://schemas.openxmlformats.org/drawingml/2006/main"/>
           <a:p xmlns:a="http://schemas.openxmlformats.org/drawingml/2006/main">
             <a:r>
-              <a:t>Step 5 Replace and remove</a:t>
+              <a:t>Step 3: Remove the bridge</a:t>
             </a:r>
             <a:endParaRPr/>
           </a:p>
@@ -6296,7 +6815,7 @@
     </p:spTree>
     <p:extLst>
       <p:ext uri="{BB962C8B-B14F-4D97-AF65-F5344CB8AC3E}">
-        <p14:creationId xmlns:p14="http://schemas.microsoft.com/office/powerpoint/2010/main" val="254177913"/>
+        <p14:creationId xmlns:p14="http://schemas.microsoft.com/office/powerpoint/2010/main" val="466145922"/>
       </p:ext>
     </p:extLst>
   </p:cSld>
